--- a/decks/Heme_04_Platelet-Disorders-and-Thrombocytopenia.pptx
+++ b/decks/Heme_04_Platelet-Disorders-and-Thrombocytopenia.pptx
@@ -26,9 +26,13 @@
     <p:sldId id="274" r:id="rId20"/>
     <p:sldId id="275" r:id="rId21"/>
     <p:sldId id="276" r:id="rId22"/>
+    <p:sldId id="285" r:id="rId36"/>
     <p:sldId id="277" r:id="rId23"/>
+    <p:sldId id="284" r:id="rId35"/>
     <p:sldId id="278" r:id="rId24"/>
+    <p:sldId id="283" r:id="rId34"/>
     <p:sldId id="279" r:id="rId25"/>
+    <p:sldId id="282" r:id="rId33"/>
     <p:sldId id="280" r:id="rId26"/>
     <p:sldId id="281" r:id="rId27"/>
   </p:sldIdLst>
@@ -3121,6 +3125,10 @@
           </a:solidFill>
           <a:ln/>
         </p:spPr>
+        <p:txBody>
+          <a:bodyPr/>
+          <a:p/>
+        </p:txBody>
       </p:sp>
       <p:sp>
         <p:nvSpPr>
@@ -3143,6 +3151,10 @@
           </a:solidFill>
           <a:ln/>
         </p:spPr>
+        <p:txBody>
+          <a:bodyPr/>
+          <a:p/>
+        </p:txBody>
       </p:sp>
       <p:sp>
         <p:nvSpPr>
@@ -3165,6 +3177,10 @@
           </a:solidFill>
           <a:ln/>
         </p:spPr>
+        <p:txBody>
+          <a:bodyPr/>
+          <a:p/>
+        </p:txBody>
       </p:sp>
       <p:sp>
         <p:nvSpPr>
@@ -3187,6 +3203,10 @@
           </a:solidFill>
           <a:ln/>
         </p:spPr>
+        <p:txBody>
+          <a:bodyPr/>
+          <a:p/>
+        </p:txBody>
       </p:sp>
       <p:sp>
         <p:nvSpPr>
@@ -3603,6 +3623,10 @@
             </a:outerShdw>
           </a:effectLst>
         </p:spPr>
+        <p:txBody>
+          <a:bodyPr/>
+          <a:p/>
+        </p:txBody>
       </p:sp>
       <p:sp>
         <p:nvSpPr>
@@ -3777,6 +3801,10 @@
             </a:outerShdw>
           </a:effectLst>
         </p:spPr>
+        <p:txBody>
+          <a:bodyPr/>
+          <a:p/>
+        </p:txBody>
       </p:sp>
       <p:sp>
         <p:nvSpPr>
@@ -4167,6 +4195,10 @@
             </a:outerShdw>
           </a:effectLst>
         </p:spPr>
+        <p:txBody>
+          <a:bodyPr/>
+          <a:p/>
+        </p:txBody>
       </p:sp>
       <p:sp>
         <p:nvSpPr>
@@ -4341,6 +4373,10 @@
             </a:outerShdw>
           </a:effectLst>
         </p:spPr>
+        <p:txBody>
+          <a:bodyPr/>
+          <a:p/>
+        </p:txBody>
       </p:sp>
       <p:sp>
         <p:nvSpPr>
@@ -4736,6 +4772,10 @@
             </a:outerShdw>
           </a:effectLst>
         </p:spPr>
+        <p:txBody>
+          <a:bodyPr/>
+          <a:p/>
+        </p:txBody>
       </p:sp>
       <p:pic>
         <p:nvPicPr>
@@ -5044,6 +5084,10 @@
             </a:outerShdw>
           </a:effectLst>
         </p:spPr>
+        <p:txBody>
+          <a:bodyPr/>
+          <a:p/>
+        </p:txBody>
       </p:sp>
       <p:sp>
         <p:nvSpPr>
@@ -5218,6 +5262,10 @@
             </a:outerShdw>
           </a:effectLst>
         </p:spPr>
+        <p:txBody>
+          <a:bodyPr/>
+          <a:p/>
+        </p:txBody>
       </p:sp>
       <p:sp>
         <p:nvSpPr>
@@ -5523,6 +5571,10 @@
           </a:solidFill>
           <a:ln/>
         </p:spPr>
+        <p:txBody>
+          <a:bodyPr/>
+          <a:p/>
+        </p:txBody>
       </p:sp>
       <p:sp>
         <p:nvSpPr>
@@ -5545,6 +5597,10 @@
           </a:solidFill>
           <a:ln/>
         </p:spPr>
+        <p:txBody>
+          <a:bodyPr/>
+          <a:p/>
+        </p:txBody>
       </p:sp>
       <p:sp>
         <p:nvSpPr>
@@ -5801,6 +5857,10 @@
             </a:outerShdw>
           </a:effectLst>
         </p:spPr>
+        <p:txBody>
+          <a:bodyPr/>
+          <a:p/>
+        </p:txBody>
       </p:sp>
       <p:sp>
         <p:nvSpPr>
@@ -5911,6 +5971,10 @@
             </a:outerShdw>
           </a:effectLst>
         </p:spPr>
+        <p:txBody>
+          <a:bodyPr/>
+          <a:p/>
+        </p:txBody>
       </p:sp>
       <p:sp>
         <p:nvSpPr>
@@ -6340,6 +6404,10 @@
             </a:outerShdw>
           </a:effectLst>
         </p:spPr>
+        <p:txBody>
+          <a:bodyPr/>
+          <a:p/>
+        </p:txBody>
       </p:sp>
       <p:sp>
         <p:nvSpPr>
@@ -6666,6 +6734,10 @@
             </a:outerShdw>
           </a:effectLst>
         </p:spPr>
+        <p:txBody>
+          <a:bodyPr/>
+          <a:p/>
+        </p:txBody>
       </p:sp>
       <p:sp>
         <p:nvSpPr>
@@ -6776,6 +6848,10 @@
             </a:outerShdw>
           </a:effectLst>
         </p:spPr>
+        <p:txBody>
+          <a:bodyPr/>
+          <a:p/>
+        </p:txBody>
       </p:sp>
       <p:sp>
         <p:nvSpPr>
@@ -7205,6 +7281,10 @@
             </a:outerShdw>
           </a:effectLst>
         </p:spPr>
+        <p:txBody>
+          <a:bodyPr/>
+          <a:p/>
+        </p:txBody>
       </p:sp>
       <p:sp>
         <p:nvSpPr>
@@ -7531,6 +7611,10 @@
             </a:outerShdw>
           </a:effectLst>
         </p:spPr>
+        <p:txBody>
+          <a:bodyPr/>
+          <a:p/>
+        </p:txBody>
       </p:sp>
       <p:sp>
         <p:nvSpPr>
@@ -7641,6 +7725,10 @@
             </a:outerShdw>
           </a:effectLst>
         </p:spPr>
+        <p:txBody>
+          <a:bodyPr/>
+          <a:p/>
+        </p:txBody>
       </p:sp>
       <p:sp>
         <p:nvSpPr>
@@ -7964,6 +8052,10 @@
             </a:outerShdw>
           </a:effectLst>
         </p:spPr>
+        <p:txBody>
+          <a:bodyPr/>
+          <a:p/>
+        </p:txBody>
       </p:sp>
       <p:sp>
         <p:nvSpPr>
@@ -8071,6 +8163,10 @@
             </a:outerShdw>
           </a:effectLst>
         </p:spPr>
+        <p:txBody>
+          <a:bodyPr/>
+          <a:p/>
+        </p:txBody>
       </p:sp>
       <p:sp>
         <p:nvSpPr>
@@ -8178,6 +8274,10 @@
             </a:outerShdw>
           </a:effectLst>
         </p:spPr>
+        <p:txBody>
+          <a:bodyPr/>
+          <a:p/>
+        </p:txBody>
       </p:sp>
       <p:sp>
         <p:nvSpPr>
@@ -8285,6 +8385,10 @@
             </a:outerShdw>
           </a:effectLst>
         </p:spPr>
+        <p:txBody>
+          <a:bodyPr/>
+          <a:p/>
+        </p:txBody>
       </p:sp>
       <p:sp>
         <p:nvSpPr>
@@ -8721,6 +8825,10 @@
             </a:outerShdw>
           </a:effectLst>
         </p:spPr>
+        <p:txBody>
+          <a:bodyPr/>
+          <a:p/>
+        </p:txBody>
       </p:sp>
       <p:sp>
         <p:nvSpPr>
@@ -9109,9 +9217,9 @@
               <a:buNone/>
             </a:pPr>
             <a:r>
-              <a:rPr lang="en-US" sz="1350" b="1" dirty="0">
-                <a:solidFill>
-                  <a:srgbClr val="8E1622"/>
+              <a:rPr lang="en-US" sz="1350" b="0" dirty="0">
+                <a:solidFill>
+                  <a:srgbClr val="33444F"/>
                 </a:solidFill>
                 <a:latin typeface="Calibri" pitchFamily="34" charset="0"/>
                 <a:ea typeface="Calibri" pitchFamily="34" charset="-122"/>
@@ -9180,130 +9288,6 @@
               <a:t>E. Give IVIG</a:t>
             </a:r>
             <a:endParaRPr lang="en-US" sz="1350" dirty="0"/>
-          </a:p>
-        </p:txBody>
-      </p:sp>
-      <p:sp>
-        <p:nvSpPr>
-          <p:cNvPr id="6" name="Shape 4"/>
-          <p:cNvSpPr/>
-          <p:nvPr/>
-        </p:nvSpPr>
-        <p:spPr>
-          <a:xfrm>
-            <a:off x="7201632" y="2395728"/>
-            <a:ext cx="4423136" cy="3246120"/>
-          </a:xfrm>
-          <a:prstGeom prst="roundRect">
-            <a:avLst>
-              <a:gd name="adj" fmla="val 2535"/>
-            </a:avLst>
-          </a:prstGeom>
-          <a:solidFill>
-            <a:srgbClr val="FBEAEC"/>
-          </a:solidFill>
-          <a:ln/>
-          <a:effectLst>
-            <a:outerShdw sx="100000" sy="100000" kx="0" ky="0" algn="bl" rotWithShape="0" blurRad="88900" dist="25400" dir="5400000">
-              <a:srgbClr val="22303C">
-                <a:alpha val="12000"/>
-              </a:srgbClr>
-            </a:outerShdw>
-          </a:effectLst>
-        </p:spPr>
-      </p:sp>
-      <p:sp>
-        <p:nvSpPr>
-          <p:cNvPr id="7" name="Text 5"/>
-          <p:cNvSpPr/>
-          <p:nvPr/>
-        </p:nvSpPr>
-        <p:spPr>
-          <a:xfrm>
-            <a:off x="7439376" y="2578608"/>
-            <a:ext cx="3965936" cy="457200"/>
-          </a:xfrm>
-          <a:prstGeom prst="rect">
-            <a:avLst/>
-          </a:prstGeom>
-          <a:noFill/>
-          <a:ln/>
-        </p:spPr>
-        <p:txBody>
-          <a:bodyPr wrap="square" lIns="0" tIns="0" rIns="0" bIns="0" rtlCol="0" anchor="ctr"/>
-          <a:lstStyle/>
-          <a:p>
-            <a:pPr indent="0" marL="0">
-              <a:buNone/>
-            </a:pPr>
-            <a:r>
-              <a:rPr lang="en-US" sz="1500" b="1" dirty="0">
-                <a:solidFill>
-                  <a:srgbClr val="C62133"/>
-                </a:solidFill>
-                <a:latin typeface="Calibri" pitchFamily="34" charset="0"/>
-                <a:ea typeface="Calibri" pitchFamily="34" charset="-122"/>
-                <a:cs typeface="Calibri" pitchFamily="34" charset="-120"/>
-              </a:rPr>
-              <a:t>ANSWER  </a:t>
-            </a:r>
-            <a:pPr indent="0" marL="0">
-              <a:buNone/>
-            </a:pPr>
-            <a:r>
-              <a:rPr lang="en-US" sz="1500" b="1" dirty="0">
-                <a:solidFill>
-                  <a:srgbClr val="1B2A38"/>
-                </a:solidFill>
-                <a:latin typeface="Calibri" pitchFamily="34" charset="0"/>
-                <a:ea typeface="Calibri" pitchFamily="34" charset="-122"/>
-                <a:cs typeface="Calibri" pitchFamily="34" charset="-120"/>
-              </a:rPr>
-              <a:t>B — Review the smear</a:t>
-            </a:r>
-            <a:endParaRPr lang="en-US" sz="1500" dirty="0"/>
-          </a:p>
-        </p:txBody>
-      </p:sp>
-      <p:sp>
-        <p:nvSpPr>
-          <p:cNvPr id="8" name="Text 6"/>
-          <p:cNvSpPr/>
-          <p:nvPr/>
-        </p:nvSpPr>
-        <p:spPr>
-          <a:xfrm>
-            <a:off x="7439376" y="3127248"/>
-            <a:ext cx="3947648" cy="2377440"/>
-          </a:xfrm>
-          <a:prstGeom prst="rect">
-            <a:avLst/>
-          </a:prstGeom>
-          <a:noFill/>
-          <a:ln/>
-        </p:spPr>
-        <p:txBody>
-          <a:bodyPr wrap="square" lIns="0" tIns="0" rIns="0" bIns="0" rtlCol="0" anchor="t"/>
-          <a:lstStyle/>
-          <a:p>
-            <a:pPr algn="l" indent="0" marL="0">
-              <a:lnSpc>
-                <a:spcPct val="108000"/>
-              </a:lnSpc>
-              <a:buNone/>
-            </a:pPr>
-            <a:r>
-              <a:rPr lang="en-US" sz="1250" dirty="0">
-                <a:solidFill>
-                  <a:srgbClr val="33444F"/>
-                </a:solidFill>
-                <a:latin typeface="Calibri" pitchFamily="34" charset="0"/>
-                <a:ea typeface="Calibri" pitchFamily="34" charset="-122"/>
-                <a:cs typeface="Calibri" pitchFamily="34" charset="-120"/>
-              </a:rPr>
-              <a:t>Excluding EDTA-induced clumping (pseudothrombocytopenia) prevents unnecessary, potentially harmful treatment.</a:t>
-            </a:r>
-            <a:endParaRPr lang="en-US" sz="1250" dirty="0"/>
           </a:p>
         </p:txBody>
       </p:sp>
@@ -9613,9 +9597,9 @@
               <a:buNone/>
             </a:pPr>
             <a:r>
-              <a:rPr lang="en-US" sz="1350" b="1" dirty="0">
-                <a:solidFill>
-                  <a:srgbClr val="8E1622"/>
+              <a:rPr lang="en-US" sz="1350" b="0" dirty="0">
+                <a:solidFill>
+                  <a:srgbClr val="33444F"/>
                 </a:solidFill>
                 <a:latin typeface="Calibri" pitchFamily="34" charset="0"/>
                 <a:ea typeface="Calibri" pitchFamily="34" charset="-122"/>
@@ -9684,130 +9668,6 @@
               <a:t>E. Iron deficiency</a:t>
             </a:r>
             <a:endParaRPr lang="en-US" sz="1350" dirty="0"/>
-          </a:p>
-        </p:txBody>
-      </p:sp>
-      <p:sp>
-        <p:nvSpPr>
-          <p:cNvPr id="6" name="Shape 4"/>
-          <p:cNvSpPr/>
-          <p:nvPr/>
-        </p:nvSpPr>
-        <p:spPr>
-          <a:xfrm>
-            <a:off x="7201632" y="2395728"/>
-            <a:ext cx="4423136" cy="3246120"/>
-          </a:xfrm>
-          <a:prstGeom prst="roundRect">
-            <a:avLst>
-              <a:gd name="adj" fmla="val 2535"/>
-            </a:avLst>
-          </a:prstGeom>
-          <a:solidFill>
-            <a:srgbClr val="FBEAEC"/>
-          </a:solidFill>
-          <a:ln/>
-          <a:effectLst>
-            <a:outerShdw sx="100000" sy="100000" kx="0" ky="0" algn="bl" rotWithShape="0" blurRad="88900" dist="25400" dir="5400000">
-              <a:srgbClr val="22303C">
-                <a:alpha val="12000"/>
-              </a:srgbClr>
-            </a:outerShdw>
-          </a:effectLst>
-        </p:spPr>
-      </p:sp>
-      <p:sp>
-        <p:nvSpPr>
-          <p:cNvPr id="7" name="Text 5"/>
-          <p:cNvSpPr/>
-          <p:nvPr/>
-        </p:nvSpPr>
-        <p:spPr>
-          <a:xfrm>
-            <a:off x="7439376" y="2578608"/>
-            <a:ext cx="3965936" cy="457200"/>
-          </a:xfrm>
-          <a:prstGeom prst="rect">
-            <a:avLst/>
-          </a:prstGeom>
-          <a:noFill/>
-          <a:ln/>
-        </p:spPr>
-        <p:txBody>
-          <a:bodyPr wrap="square" lIns="0" tIns="0" rIns="0" bIns="0" rtlCol="0" anchor="ctr"/>
-          <a:lstStyle/>
-          <a:p>
-            <a:pPr indent="0" marL="0">
-              <a:buNone/>
-            </a:pPr>
-            <a:r>
-              <a:rPr lang="en-US" sz="1500" b="1" dirty="0">
-                <a:solidFill>
-                  <a:srgbClr val="C62133"/>
-                </a:solidFill>
-                <a:latin typeface="Calibri" pitchFamily="34" charset="0"/>
-                <a:ea typeface="Calibri" pitchFamily="34" charset="-122"/>
-                <a:cs typeface="Calibri" pitchFamily="34" charset="-120"/>
-              </a:rPr>
-              <a:t>ANSWER  </a:t>
-            </a:r>
-            <a:pPr indent="0" marL="0">
-              <a:buNone/>
-            </a:pPr>
-            <a:r>
-              <a:rPr lang="en-US" sz="1500" b="1" dirty="0">
-                <a:solidFill>
-                  <a:srgbClr val="1B2A38"/>
-                </a:solidFill>
-                <a:latin typeface="Calibri" pitchFamily="34" charset="0"/>
-                <a:ea typeface="Calibri" pitchFamily="34" charset="-122"/>
-                <a:cs typeface="Calibri" pitchFamily="34" charset="-120"/>
-              </a:rPr>
-              <a:t>B — Thrombotic microangiopathy</a:t>
-            </a:r>
-            <a:endParaRPr lang="en-US" sz="1500" dirty="0"/>
-          </a:p>
-        </p:txBody>
-      </p:sp>
-      <p:sp>
-        <p:nvSpPr>
-          <p:cNvPr id="8" name="Text 6"/>
-          <p:cNvSpPr/>
-          <p:nvPr/>
-        </p:nvSpPr>
-        <p:spPr>
-          <a:xfrm>
-            <a:off x="7439376" y="3127248"/>
-            <a:ext cx="3947648" cy="2377440"/>
-          </a:xfrm>
-          <a:prstGeom prst="rect">
-            <a:avLst/>
-          </a:prstGeom>
-          <a:noFill/>
-          <a:ln/>
-        </p:spPr>
-        <p:txBody>
-          <a:bodyPr wrap="square" lIns="0" tIns="0" rIns="0" bIns="0" rtlCol="0" anchor="t"/>
-          <a:lstStyle/>
-          <a:p>
-            <a:pPr algn="l" indent="0" marL="0">
-              <a:lnSpc>
-                <a:spcPct val="108000"/>
-              </a:lnSpc>
-              <a:buNone/>
-            </a:pPr>
-            <a:r>
-              <a:rPr lang="en-US" sz="1250" dirty="0">
-                <a:solidFill>
-                  <a:srgbClr val="33444F"/>
-                </a:solidFill>
-                <a:latin typeface="Calibri" pitchFamily="34" charset="0"/>
-                <a:ea typeface="Calibri" pitchFamily="34" charset="-122"/>
-                <a:cs typeface="Calibri" pitchFamily="34" charset="-120"/>
-              </a:rPr>
-              <a:t>Schistocytes with thrombocytopenia indicate a microangiopathic process requiring urgent evaluation.</a:t>
-            </a:r>
-            <a:endParaRPr lang="en-US" sz="1250" dirty="0"/>
           </a:p>
         </p:txBody>
       </p:sp>
@@ -10117,9 +9977,9 @@
               <a:buNone/>
             </a:pPr>
             <a:r>
-              <a:rPr lang="en-US" sz="1350" b="1" dirty="0">
-                <a:solidFill>
-                  <a:srgbClr val="8E1622"/>
+              <a:rPr lang="en-US" sz="1350" b="0" dirty="0">
+                <a:solidFill>
+                  <a:srgbClr val="33444F"/>
                 </a:solidFill>
                 <a:latin typeface="Calibri" pitchFamily="34" charset="0"/>
                 <a:ea typeface="Calibri" pitchFamily="34" charset="-122"/>
@@ -10188,130 +10048,6 @@
               <a:t>E. Marrow failure</a:t>
             </a:r>
             <a:endParaRPr lang="en-US" sz="1350" dirty="0"/>
-          </a:p>
-        </p:txBody>
-      </p:sp>
-      <p:sp>
-        <p:nvSpPr>
-          <p:cNvPr id="6" name="Shape 4"/>
-          <p:cNvSpPr/>
-          <p:nvPr/>
-        </p:nvSpPr>
-        <p:spPr>
-          <a:xfrm>
-            <a:off x="7201632" y="2395728"/>
-            <a:ext cx="4423136" cy="3246120"/>
-          </a:xfrm>
-          <a:prstGeom prst="roundRect">
-            <a:avLst>
-              <a:gd name="adj" fmla="val 2535"/>
-            </a:avLst>
-          </a:prstGeom>
-          <a:solidFill>
-            <a:srgbClr val="FBEAEC"/>
-          </a:solidFill>
-          <a:ln/>
-          <a:effectLst>
-            <a:outerShdw sx="100000" sy="100000" kx="0" ky="0" algn="bl" rotWithShape="0" blurRad="88900" dist="25400" dir="5400000">
-              <a:srgbClr val="22303C">
-                <a:alpha val="12000"/>
-              </a:srgbClr>
-            </a:outerShdw>
-          </a:effectLst>
-        </p:spPr>
-      </p:sp>
-      <p:sp>
-        <p:nvSpPr>
-          <p:cNvPr id="7" name="Text 5"/>
-          <p:cNvSpPr/>
-          <p:nvPr/>
-        </p:nvSpPr>
-        <p:spPr>
-          <a:xfrm>
-            <a:off x="7439376" y="2578608"/>
-            <a:ext cx="3965936" cy="457200"/>
-          </a:xfrm>
-          <a:prstGeom prst="rect">
-            <a:avLst/>
-          </a:prstGeom>
-          <a:noFill/>
-          <a:ln/>
-        </p:spPr>
-        <p:txBody>
-          <a:bodyPr wrap="square" lIns="0" tIns="0" rIns="0" bIns="0" rtlCol="0" anchor="ctr"/>
-          <a:lstStyle/>
-          <a:p>
-            <a:pPr indent="0" marL="0">
-              <a:buNone/>
-            </a:pPr>
-            <a:r>
-              <a:rPr lang="en-US" sz="1500" b="1" dirty="0">
-                <a:solidFill>
-                  <a:srgbClr val="C62133"/>
-                </a:solidFill>
-                <a:latin typeface="Calibri" pitchFamily="34" charset="0"/>
-                <a:ea typeface="Calibri" pitchFamily="34" charset="-122"/>
-                <a:cs typeface="Calibri" pitchFamily="34" charset="-120"/>
-              </a:rPr>
-              <a:t>ANSWER  </a:t>
-            </a:r>
-            <a:pPr indent="0" marL="0">
-              <a:buNone/>
-            </a:pPr>
-            <a:r>
-              <a:rPr lang="en-US" sz="1500" b="1" dirty="0">
-                <a:solidFill>
-                  <a:srgbClr val="1B2A38"/>
-                </a:solidFill>
-                <a:latin typeface="Calibri" pitchFamily="34" charset="0"/>
-                <a:ea typeface="Calibri" pitchFamily="34" charset="-122"/>
-                <a:cs typeface="Calibri" pitchFamily="34" charset="-120"/>
-              </a:rPr>
-              <a:t>B — Thrombosis</a:t>
-            </a:r>
-            <a:endParaRPr lang="en-US" sz="1500" dirty="0"/>
-          </a:p>
-        </p:txBody>
-      </p:sp>
-      <p:sp>
-        <p:nvSpPr>
-          <p:cNvPr id="8" name="Text 6"/>
-          <p:cNvSpPr/>
-          <p:nvPr/>
-        </p:nvSpPr>
-        <p:spPr>
-          <a:xfrm>
-            <a:off x="7439376" y="3127248"/>
-            <a:ext cx="3947648" cy="2377440"/>
-          </a:xfrm>
-          <a:prstGeom prst="rect">
-            <a:avLst/>
-          </a:prstGeom>
-          <a:noFill/>
-          <a:ln/>
-        </p:spPr>
-        <p:txBody>
-          <a:bodyPr wrap="square" lIns="0" tIns="0" rIns="0" bIns="0" rtlCol="0" anchor="t"/>
-          <a:lstStyle/>
-          <a:p>
-            <a:pPr algn="l" indent="0" marL="0">
-              <a:lnSpc>
-                <a:spcPct val="108000"/>
-              </a:lnSpc>
-              <a:buNone/>
-            </a:pPr>
-            <a:r>
-              <a:rPr lang="en-US" sz="1250" dirty="0">
-                <a:solidFill>
-                  <a:srgbClr val="33444F"/>
-                </a:solidFill>
-                <a:latin typeface="Calibri" pitchFamily="34" charset="0"/>
-                <a:ea typeface="Calibri" pitchFamily="34" charset="-122"/>
-                <a:cs typeface="Calibri" pitchFamily="34" charset="-120"/>
-              </a:rPr>
-              <a:t>HIT is prothrombotic; management is to stop heparin and start a non-heparin anticoagulant, not to transfuse platelets.</a:t>
-            </a:r>
-            <a:endParaRPr lang="en-US" sz="1250" dirty="0"/>
           </a:p>
         </p:txBody>
       </p:sp>
@@ -10601,9 +10337,9 @@
               <a:buNone/>
             </a:pPr>
             <a:r>
-              <a:rPr lang="en-US" sz="1350" b="1" dirty="0">
-                <a:solidFill>
-                  <a:srgbClr val="8E1622"/>
+              <a:rPr lang="en-US" sz="1350" b="0" dirty="0">
+                <a:solidFill>
+                  <a:srgbClr val="33444F"/>
                 </a:solidFill>
                 <a:latin typeface="Calibri" pitchFamily="34" charset="0"/>
                 <a:ea typeface="Calibri" pitchFamily="34" charset="-122"/>
@@ -10692,130 +10428,6 @@
               <a:t>E. ITP</a:t>
             </a:r>
             <a:endParaRPr lang="en-US" sz="1350" dirty="0"/>
-          </a:p>
-        </p:txBody>
-      </p:sp>
-      <p:sp>
-        <p:nvSpPr>
-          <p:cNvPr id="6" name="Shape 4"/>
-          <p:cNvSpPr/>
-          <p:nvPr/>
-        </p:nvSpPr>
-        <p:spPr>
-          <a:xfrm>
-            <a:off x="7201632" y="2395728"/>
-            <a:ext cx="4423136" cy="3246120"/>
-          </a:xfrm>
-          <a:prstGeom prst="roundRect">
-            <a:avLst>
-              <a:gd name="adj" fmla="val 2535"/>
-            </a:avLst>
-          </a:prstGeom>
-          <a:solidFill>
-            <a:srgbClr val="FBEAEC"/>
-          </a:solidFill>
-          <a:ln/>
-          <a:effectLst>
-            <a:outerShdw sx="100000" sy="100000" kx="0" ky="0" algn="bl" rotWithShape="0" blurRad="88900" dist="25400" dir="5400000">
-              <a:srgbClr val="22303C">
-                <a:alpha val="12000"/>
-              </a:srgbClr>
-            </a:outerShdw>
-          </a:effectLst>
-        </p:spPr>
-      </p:sp>
-      <p:sp>
-        <p:nvSpPr>
-          <p:cNvPr id="7" name="Text 5"/>
-          <p:cNvSpPr/>
-          <p:nvPr/>
-        </p:nvSpPr>
-        <p:spPr>
-          <a:xfrm>
-            <a:off x="7439376" y="2578608"/>
-            <a:ext cx="3965936" cy="457200"/>
-          </a:xfrm>
-          <a:prstGeom prst="rect">
-            <a:avLst/>
-          </a:prstGeom>
-          <a:noFill/>
-          <a:ln/>
-        </p:spPr>
-        <p:txBody>
-          <a:bodyPr wrap="square" lIns="0" tIns="0" rIns="0" bIns="0" rtlCol="0" anchor="ctr"/>
-          <a:lstStyle/>
-          <a:p>
-            <a:pPr indent="0" marL="0">
-              <a:buNone/>
-            </a:pPr>
-            <a:r>
-              <a:rPr lang="en-US" sz="1500" b="1" dirty="0">
-                <a:solidFill>
-                  <a:srgbClr val="C62133"/>
-                </a:solidFill>
-                <a:latin typeface="Calibri" pitchFamily="34" charset="0"/>
-                <a:ea typeface="Calibri" pitchFamily="34" charset="-122"/>
-                <a:cs typeface="Calibri" pitchFamily="34" charset="-120"/>
-              </a:rPr>
-              <a:t>ANSWER  </a:t>
-            </a:r>
-            <a:pPr indent="0" marL="0">
-              <a:buNone/>
-            </a:pPr>
-            <a:r>
-              <a:rPr lang="en-US" sz="1500" b="1" dirty="0">
-                <a:solidFill>
-                  <a:srgbClr val="1B2A38"/>
-                </a:solidFill>
-                <a:latin typeface="Calibri" pitchFamily="34" charset="0"/>
-                <a:ea typeface="Calibri" pitchFamily="34" charset="-122"/>
-                <a:cs typeface="Calibri" pitchFamily="34" charset="-120"/>
-              </a:rPr>
-              <a:t>A — Qualitative platelet disorder</a:t>
-            </a:r>
-            <a:endParaRPr lang="en-US" sz="1500" dirty="0"/>
-          </a:p>
-        </p:txBody>
-      </p:sp>
-      <p:sp>
-        <p:nvSpPr>
-          <p:cNvPr id="8" name="Text 6"/>
-          <p:cNvSpPr/>
-          <p:nvPr/>
-        </p:nvSpPr>
-        <p:spPr>
-          <a:xfrm>
-            <a:off x="7439376" y="3127248"/>
-            <a:ext cx="3947648" cy="2377440"/>
-          </a:xfrm>
-          <a:prstGeom prst="rect">
-            <a:avLst/>
-          </a:prstGeom>
-          <a:noFill/>
-          <a:ln/>
-        </p:spPr>
-        <p:txBody>
-          <a:bodyPr wrap="square" lIns="0" tIns="0" rIns="0" bIns="0" rtlCol="0" anchor="t"/>
-          <a:lstStyle/>
-          <a:p>
-            <a:pPr algn="l" indent="0" marL="0">
-              <a:lnSpc>
-                <a:spcPct val="108000"/>
-              </a:lnSpc>
-              <a:buNone/>
-            </a:pPr>
-            <a:r>
-              <a:rPr lang="en-US" sz="1250" dirty="0">
-                <a:solidFill>
-                  <a:srgbClr val="33444F"/>
-                </a:solidFill>
-                <a:latin typeface="Calibri" pitchFamily="34" charset="0"/>
-                <a:ea typeface="Calibri" pitchFamily="34" charset="-122"/>
-                <a:cs typeface="Calibri" pitchFamily="34" charset="-120"/>
-              </a:rPr>
-              <a:t>Normal numbers with bleeding point to platelet dysfunction (drugs, uremia, inherited defects).</a:t>
-            </a:r>
-            <a:endParaRPr lang="en-US" sz="1250" dirty="0"/>
           </a:p>
         </p:txBody>
       </p:sp>
@@ -11056,6 +10668,10 @@
           </a:solidFill>
           <a:ln/>
         </p:spPr>
+        <p:txBody>
+          <a:bodyPr/>
+          <a:p/>
+        </p:txBody>
       </p:sp>
       <p:sp>
         <p:nvSpPr>
@@ -11083,6 +10699,10 @@
             </a:outerShdw>
           </a:effectLst>
         </p:spPr>
+        <p:txBody>
+          <a:bodyPr/>
+          <a:p/>
+        </p:txBody>
       </p:sp>
       <p:sp>
         <p:nvSpPr>
@@ -11183,6 +10803,10 @@
           </a:solidFill>
           <a:ln/>
         </p:spPr>
+        <p:txBody>
+          <a:bodyPr/>
+          <a:p/>
+        </p:txBody>
       </p:sp>
       <p:sp>
         <p:nvSpPr>
@@ -11210,6 +10834,10 @@
             </a:outerShdw>
           </a:effectLst>
         </p:spPr>
+        <p:txBody>
+          <a:bodyPr/>
+          <a:p/>
+        </p:txBody>
       </p:sp>
       <p:sp>
         <p:nvSpPr>
@@ -11310,6 +10938,10 @@
           </a:solidFill>
           <a:ln/>
         </p:spPr>
+        <p:txBody>
+          <a:bodyPr/>
+          <a:p/>
+        </p:txBody>
       </p:sp>
       <p:sp>
         <p:nvSpPr>
@@ -11337,6 +10969,10 @@
             </a:outerShdw>
           </a:effectLst>
         </p:spPr>
+        <p:txBody>
+          <a:bodyPr/>
+          <a:p/>
+        </p:txBody>
       </p:sp>
       <p:sp>
         <p:nvSpPr>
@@ -11437,6 +11073,10 @@
           </a:solidFill>
           <a:ln/>
         </p:spPr>
+        <p:txBody>
+          <a:bodyPr/>
+          <a:p/>
+        </p:txBody>
       </p:sp>
       <p:sp>
         <p:nvSpPr>
@@ -11464,6 +11104,10 @@
             </a:outerShdw>
           </a:effectLst>
         </p:spPr>
+        <p:txBody>
+          <a:bodyPr/>
+          <a:p/>
+        </p:txBody>
       </p:sp>
       <p:sp>
         <p:nvSpPr>
@@ -11564,6 +11208,10 @@
           </a:solidFill>
           <a:ln/>
         </p:spPr>
+        <p:txBody>
+          <a:bodyPr/>
+          <a:p/>
+        </p:txBody>
       </p:sp>
       <p:sp>
         <p:nvSpPr>
@@ -11591,6 +11239,10 @@
             </a:outerShdw>
           </a:effectLst>
         </p:spPr>
+        <p:txBody>
+          <a:bodyPr/>
+          <a:p/>
+        </p:txBody>
       </p:sp>
       <p:sp>
         <p:nvSpPr>
@@ -12074,6 +11726,1488 @@
 </p:sld>
 </file>
 
+<file path=ppt/slides/slide27.xml><?xml version="1.0" encoding="utf-8"?>
+<p:sld xmlns:a="http://schemas.openxmlformats.org/drawingml/2006/main" xmlns:p="http://schemas.openxmlformats.org/presentationml/2006/main" xmlns:r="http://schemas.openxmlformats.org/officeDocument/2006/relationships">
+  <p:cSld>
+    <p:spTree>
+      <p:nvGrpSpPr>
+        <p:cNvPr id="1" name=""/>
+        <p:cNvGrpSpPr/>
+        <p:nvPr/>
+      </p:nvGrpSpPr>
+      <p:grpSpPr/>
+      <p:sp>
+        <p:nvSpPr>
+          <p:cNvPr id="2" name="Text 0"/>
+          <p:cNvSpPr/>
+          <p:nvPr/>
+        </p:nvSpPr>
+        <p:spPr>
+          <a:xfrm>
+            <a:off x="566928" y="329184"/>
+            <a:ext cx="10515600" cy="310896"/>
+          </a:xfrm>
+          <a:prstGeom prst="rect">
+            <a:avLst/>
+          </a:prstGeom>
+          <a:noFill/>
+          <a:ln/>
+        </p:spPr>
+        <p:txBody>
+          <a:bodyPr wrap="square" lIns="0" tIns="0" rIns="0" bIns="0" rtlCol="0" anchor="ctr"/>
+          <a:lstStyle/>
+          <a:p>
+            <a:pPr algn="l" indent="0" marL="0">
+              <a:buNone/>
+            </a:pPr>
+            <a:r>
+              <a:rPr lang="en-US" sz="1100" b="1" spc="150" kern="0" dirty="0">
+                <a:solidFill>
+                  <a:srgbClr val="C62133"/>
+                </a:solidFill>
+                <a:latin typeface="Calibri" pitchFamily="34" charset="0"/>
+                <a:ea typeface="Calibri" pitchFamily="34" charset="-122"/>
+                <a:cs typeface="Calibri" pitchFamily="34" charset="-120"/>
+              </a:rPr>
+              <a:t>HEMATOLOGY &amp; COAGULATION   ·   BOARD REVIEW  ·  Q4</a:t>
+            </a:r>
+            <a:endParaRPr lang="en-US" sz="1100" dirty="0"/>
+          </a:p>
+        </p:txBody>
+      </p:sp>
+      <p:sp>
+        <p:nvSpPr>
+          <p:cNvPr id="3" name="Text 1"/>
+          <p:cNvSpPr/>
+          <p:nvPr/>
+        </p:nvSpPr>
+        <p:spPr>
+          <a:xfrm>
+            <a:off x="566928" y="713232"/>
+            <a:ext cx="11064240" cy="749808"/>
+          </a:xfrm>
+          <a:prstGeom prst="rect">
+            <a:avLst/>
+          </a:prstGeom>
+          <a:noFill/>
+          <a:ln/>
+        </p:spPr>
+        <p:txBody>
+          <a:bodyPr wrap="square" lIns="0" tIns="0" rIns="0" bIns="0" rtlCol="0" anchor="ctr"/>
+          <a:lstStyle/>
+          <a:p>
+            <a:pPr algn="l" indent="0" marL="0">
+              <a:buNone/>
+            </a:pPr>
+            <a:r>
+              <a:rPr lang="en-US" sz="2600" b="1" dirty="0">
+                <a:solidFill>
+                  <a:srgbClr val="0E3A5F"/>
+                </a:solidFill>
+                <a:latin typeface="Calibri" pitchFamily="34" charset="0"/>
+                <a:ea typeface="Calibri" pitchFamily="34" charset="-122"/>
+                <a:cs typeface="Calibri" pitchFamily="34" charset="-120"/>
+              </a:rPr>
+              <a:t>Board-Style Review</a:t>
+            </a:r>
+            <a:endParaRPr lang="en-US" sz="2600" dirty="0"/>
+          </a:p>
+        </p:txBody>
+      </p:sp>
+      <p:sp>
+        <p:nvSpPr>
+          <p:cNvPr id="4" name="Text 2"/>
+          <p:cNvSpPr/>
+          <p:nvPr/>
+        </p:nvSpPr>
+        <p:spPr>
+          <a:xfrm>
+            <a:off x="566928" y="1417320"/>
+            <a:ext cx="11057839" cy="914400"/>
+          </a:xfrm>
+          <a:prstGeom prst="rect">
+            <a:avLst/>
+          </a:prstGeom>
+          <a:noFill/>
+          <a:ln/>
+        </p:spPr>
+        <p:txBody>
+          <a:bodyPr wrap="square" lIns="0" tIns="0" rIns="0" bIns="0" rtlCol="0" anchor="t"/>
+          <a:lstStyle/>
+          <a:p>
+            <a:pPr algn="l" indent="0" marL="0">
+              <a:lnSpc>
+                <a:spcPct val="105000"/>
+              </a:lnSpc>
+              <a:buNone/>
+            </a:pPr>
+            <a:r>
+              <a:rPr lang="en-US" sz="1450" b="1" dirty="0">
+                <a:solidFill>
+                  <a:srgbClr val="1B2A38"/>
+                </a:solidFill>
+                <a:latin typeface="Calibri" pitchFamily="34" charset="0"/>
+                <a:ea typeface="Calibri" pitchFamily="34" charset="-122"/>
+                <a:cs typeface="Calibri" pitchFamily="34" charset="-120"/>
+              </a:rPr>
+              <a:t>Mucocutaneous bleeding with a NORMAL platelet count suggests:</a:t>
+            </a:r>
+            <a:endParaRPr lang="en-US" sz="1450" dirty="0"/>
+          </a:p>
+        </p:txBody>
+      </p:sp>
+      <p:sp>
+        <p:nvSpPr>
+          <p:cNvPr id="5" name="Text 3"/>
+          <p:cNvSpPr/>
+          <p:nvPr/>
+        </p:nvSpPr>
+        <p:spPr>
+          <a:xfrm>
+            <a:off x="658368" y="2395728"/>
+            <a:ext cx="6192390" cy="3017520"/>
+          </a:xfrm>
+          <a:prstGeom prst="rect">
+            <a:avLst/>
+          </a:prstGeom>
+          <a:noFill/>
+          <a:ln/>
+        </p:spPr>
+        <p:txBody>
+          <a:bodyPr wrap="square" lIns="0" tIns="0" rIns="0" bIns="0" rtlCol="0" anchor="t"/>
+          <a:lstStyle/>
+          <a:p>
+            <a:pPr algn="l" indent="0" marL="0">
+              <a:spcAft>
+                <a:spcPts val="600"/>
+              </a:spcAft>
+              <a:buNone/>
+            </a:pPr>
+            <a:r>
+              <a:rPr lang="en-US" sz="1350" b="1" dirty="0">
+                <a:solidFill>
+                  <a:srgbClr val="8E1622"/>
+                </a:solidFill>
+                <a:latin typeface="Calibri" pitchFamily="34" charset="0"/>
+                <a:ea typeface="Calibri" pitchFamily="34" charset="-122"/>
+                <a:cs typeface="Calibri" pitchFamily="34" charset="-120"/>
+              </a:rPr>
+              <a:t>A. A qualitative platelet disorder</a:t>
+            </a:r>
+            <a:endParaRPr lang="en-US" sz="1350" dirty="0"/>
+          </a:p>
+          <a:p>
+            <a:pPr algn="l" indent="0" marL="0">
+              <a:spcAft>
+                <a:spcPts val="600"/>
+              </a:spcAft>
+              <a:buNone/>
+            </a:pPr>
+            <a:r>
+              <a:rPr lang="en-US" sz="1350" dirty="0">
+                <a:solidFill>
+                  <a:srgbClr val="33444F"/>
+                </a:solidFill>
+                <a:latin typeface="Calibri" pitchFamily="34" charset="0"/>
+                <a:ea typeface="Calibri" pitchFamily="34" charset="-122"/>
+                <a:cs typeface="Calibri" pitchFamily="34" charset="-120"/>
+              </a:rPr>
+              <a:t>B. DIC</a:t>
+            </a:r>
+            <a:endParaRPr lang="en-US" sz="1350" dirty="0"/>
+          </a:p>
+          <a:p>
+            <a:pPr algn="l" indent="0" marL="0">
+              <a:spcAft>
+                <a:spcPts val="600"/>
+              </a:spcAft>
+              <a:buNone/>
+            </a:pPr>
+            <a:r>
+              <a:rPr lang="en-US" sz="1350" dirty="0">
+                <a:solidFill>
+                  <a:srgbClr val="33444F"/>
+                </a:solidFill>
+                <a:latin typeface="Calibri" pitchFamily="34" charset="0"/>
+                <a:ea typeface="Calibri" pitchFamily="34" charset="-122"/>
+                <a:cs typeface="Calibri" pitchFamily="34" charset="-120"/>
+              </a:rPr>
+              <a:t>C. TTP</a:t>
+            </a:r>
+            <a:endParaRPr lang="en-US" sz="1350" dirty="0"/>
+          </a:p>
+          <a:p>
+            <a:pPr algn="l" indent="0" marL="0">
+              <a:spcAft>
+                <a:spcPts val="600"/>
+              </a:spcAft>
+              <a:buNone/>
+            </a:pPr>
+            <a:r>
+              <a:rPr lang="en-US" sz="1350" dirty="0">
+                <a:solidFill>
+                  <a:srgbClr val="33444F"/>
+                </a:solidFill>
+                <a:latin typeface="Calibri" pitchFamily="34" charset="0"/>
+                <a:ea typeface="Calibri" pitchFamily="34" charset="-122"/>
+                <a:cs typeface="Calibri" pitchFamily="34" charset="-120"/>
+              </a:rPr>
+              <a:t>D. Pseudothrombocytopenia</a:t>
+            </a:r>
+            <a:endParaRPr lang="en-US" sz="1350" dirty="0"/>
+          </a:p>
+          <a:p>
+            <a:pPr algn="l" indent="0" marL="0">
+              <a:spcAft>
+                <a:spcPts val="600"/>
+              </a:spcAft>
+              <a:buNone/>
+            </a:pPr>
+            <a:r>
+              <a:rPr lang="en-US" sz="1350" dirty="0">
+                <a:solidFill>
+                  <a:srgbClr val="33444F"/>
+                </a:solidFill>
+                <a:latin typeface="Calibri" pitchFamily="34" charset="0"/>
+                <a:ea typeface="Calibri" pitchFamily="34" charset="-122"/>
+                <a:cs typeface="Calibri" pitchFamily="34" charset="-120"/>
+              </a:rPr>
+              <a:t>E. ITP</a:t>
+            </a:r>
+            <a:endParaRPr lang="en-US" sz="1350" dirty="0"/>
+          </a:p>
+        </p:txBody>
+      </p:sp>
+      <p:sp>
+        <p:nvSpPr>
+          <p:cNvPr id="6" name="Shape 4"/>
+          <p:cNvSpPr/>
+          <p:nvPr/>
+        </p:nvSpPr>
+        <p:spPr>
+          <a:xfrm>
+            <a:off x="7201632" y="2395728"/>
+            <a:ext cx="4423136" cy="3246120"/>
+          </a:xfrm>
+          <a:prstGeom prst="roundRect">
+            <a:avLst>
+              <a:gd name="adj" fmla="val 2535"/>
+            </a:avLst>
+          </a:prstGeom>
+          <a:solidFill>
+            <a:srgbClr val="FBEAEC"/>
+          </a:solidFill>
+          <a:ln/>
+          <a:effectLst>
+            <a:outerShdw sx="100000" sy="100000" kx="0" ky="0" algn="bl" rotWithShape="0" blurRad="88900" dist="25400" dir="5400000">
+              <a:srgbClr val="22303C">
+                <a:alpha val="12000"/>
+              </a:srgbClr>
+            </a:outerShdw>
+          </a:effectLst>
+        </p:spPr>
+        <p:txBody>
+          <a:bodyPr/>
+          <a:p/>
+        </p:txBody>
+      </p:sp>
+      <p:sp>
+        <p:nvSpPr>
+          <p:cNvPr id="7" name="Text 5"/>
+          <p:cNvSpPr/>
+          <p:nvPr/>
+        </p:nvSpPr>
+        <p:spPr>
+          <a:xfrm>
+            <a:off x="7439376" y="2578608"/>
+            <a:ext cx="3965936" cy="457200"/>
+          </a:xfrm>
+          <a:prstGeom prst="rect">
+            <a:avLst/>
+          </a:prstGeom>
+          <a:noFill/>
+          <a:ln/>
+        </p:spPr>
+        <p:txBody>
+          <a:bodyPr wrap="square" lIns="0" tIns="0" rIns="0" bIns="0" rtlCol="0" anchor="ctr"/>
+          <a:lstStyle/>
+          <a:p>
+            <a:pPr indent="0" marL="0">
+              <a:buNone/>
+            </a:pPr>
+            <a:r>
+              <a:rPr lang="en-US" sz="1500" b="1" dirty="0">
+                <a:solidFill>
+                  <a:srgbClr val="C62133"/>
+                </a:solidFill>
+                <a:latin typeface="Calibri" pitchFamily="34" charset="0"/>
+                <a:ea typeface="Calibri" pitchFamily="34" charset="-122"/>
+                <a:cs typeface="Calibri" pitchFamily="34" charset="-120"/>
+              </a:rPr>
+              <a:t>ANSWER  </a:t>
+            </a:r>
+            <a:pPr indent="0" marL="0">
+              <a:buNone/>
+            </a:pPr>
+            <a:r>
+              <a:rPr lang="en-US" sz="1500" b="1" dirty="0">
+                <a:solidFill>
+                  <a:srgbClr val="1B2A38"/>
+                </a:solidFill>
+                <a:latin typeface="Calibri" pitchFamily="34" charset="0"/>
+                <a:ea typeface="Calibri" pitchFamily="34" charset="-122"/>
+                <a:cs typeface="Calibri" pitchFamily="34" charset="-120"/>
+              </a:rPr>
+              <a:t>A — Qualitative platelet disorder</a:t>
+            </a:r>
+            <a:endParaRPr lang="en-US" sz="1500" dirty="0"/>
+          </a:p>
+        </p:txBody>
+      </p:sp>
+      <p:sp>
+        <p:nvSpPr>
+          <p:cNvPr id="8" name="Text 6"/>
+          <p:cNvSpPr/>
+          <p:nvPr/>
+        </p:nvSpPr>
+        <p:spPr>
+          <a:xfrm>
+            <a:off x="7439376" y="3127248"/>
+            <a:ext cx="3947648" cy="2377440"/>
+          </a:xfrm>
+          <a:prstGeom prst="rect">
+            <a:avLst/>
+          </a:prstGeom>
+          <a:noFill/>
+          <a:ln/>
+        </p:spPr>
+        <p:txBody>
+          <a:bodyPr wrap="square" lIns="0" tIns="0" rIns="0" bIns="0" rtlCol="0" anchor="t"/>
+          <a:lstStyle/>
+          <a:p>
+            <a:pPr algn="l" indent="0" marL="0">
+              <a:lnSpc>
+                <a:spcPct val="108000"/>
+              </a:lnSpc>
+              <a:buNone/>
+            </a:pPr>
+            <a:r>
+              <a:rPr lang="en-US" sz="1250" dirty="0">
+                <a:solidFill>
+                  <a:srgbClr val="33444F"/>
+                </a:solidFill>
+                <a:latin typeface="Calibri" pitchFamily="34" charset="0"/>
+                <a:ea typeface="Calibri" pitchFamily="34" charset="-122"/>
+                <a:cs typeface="Calibri" pitchFamily="34" charset="-120"/>
+              </a:rPr>
+              <a:t>Normal numbers with bleeding point to platelet dysfunction (drugs, uremia, inherited defects).</a:t>
+            </a:r>
+            <a:endParaRPr lang="en-US" sz="1250" dirty="0"/>
+          </a:p>
+        </p:txBody>
+      </p:sp>
+      <p:sp>
+        <p:nvSpPr>
+          <p:cNvPr id="9" name="Text 7"/>
+          <p:cNvSpPr/>
+          <p:nvPr/>
+        </p:nvSpPr>
+        <p:spPr>
+          <a:xfrm>
+            <a:off x="566928" y="6473952"/>
+            <a:ext cx="7772400" cy="274320"/>
+          </a:xfrm>
+          <a:prstGeom prst="rect">
+            <a:avLst/>
+          </a:prstGeom>
+          <a:noFill/>
+          <a:ln/>
+        </p:spPr>
+        <p:txBody>
+          <a:bodyPr wrap="square" lIns="0" tIns="0" rIns="0" bIns="0" rtlCol="0" anchor="ctr"/>
+          <a:lstStyle/>
+          <a:p>
+            <a:pPr algn="l" indent="0" marL="0">
+              <a:buNone/>
+            </a:pPr>
+            <a:r>
+              <a:rPr lang="en-US" sz="850" dirty="0">
+                <a:solidFill>
+                  <a:srgbClr val="9AA8B4"/>
+                </a:solidFill>
+                <a:latin typeface="Calibri" pitchFamily="34" charset="0"/>
+                <a:ea typeface="Calibri" pitchFamily="34" charset="-122"/>
+                <a:cs typeface="Calibri" pitchFamily="34" charset="-120"/>
+              </a:rPr>
+              <a:t>Makassed General Hospital  ·  Department of Laboratory Medicine</a:t>
+            </a:r>
+            <a:endParaRPr lang="en-US" sz="850" dirty="0"/>
+          </a:p>
+        </p:txBody>
+      </p:sp>
+      <p:sp>
+        <p:nvSpPr>
+          <p:cNvPr id="10" name="Text 8"/>
+          <p:cNvSpPr/>
+          <p:nvPr/>
+        </p:nvSpPr>
+        <p:spPr>
+          <a:xfrm>
+            <a:off x="9814255" y="6473952"/>
+            <a:ext cx="1828800" cy="274320"/>
+          </a:xfrm>
+          <a:prstGeom prst="rect">
+            <a:avLst/>
+          </a:prstGeom>
+          <a:noFill/>
+          <a:ln/>
+        </p:spPr>
+        <p:txBody>
+          <a:bodyPr wrap="square" lIns="0" tIns="0" rIns="0" bIns="0" rtlCol="0" anchor="ctr"/>
+          <a:lstStyle/>
+          <a:p>
+            <a:pPr algn="r" indent="0" marL="0">
+              <a:buNone/>
+            </a:pPr>
+            <a:r>
+              <a:rPr lang="en-US" sz="850" dirty="0">
+                <a:solidFill>
+                  <a:srgbClr val="9AA8B4"/>
+                </a:solidFill>
+                <a:latin typeface="Calibri" pitchFamily="34" charset="0"/>
+                <a:ea typeface="Calibri" pitchFamily="34" charset="-122"/>
+                <a:cs typeface="Calibri" pitchFamily="34" charset="-120"/>
+              </a:rPr>
+              <a:t>CP Lecture Series</a:t>
+            </a:r>
+            <a:pPr algn="r" indent="0" marL="0">
+              <a:buNone/>
+            </a:pPr>
+            <a:r>
+              <a:rPr lang="en-US" sz="850" dirty="0">
+                <a:solidFill>
+                  <a:srgbClr val="DCE4EC"/>
+                </a:solidFill>
+                <a:latin typeface="Calibri" pitchFamily="34" charset="0"/>
+                <a:ea typeface="Calibri" pitchFamily="34" charset="-122"/>
+                <a:cs typeface="Calibri" pitchFamily="34" charset="-120"/>
+              </a:rPr>
+              <a:t>   ·   </a:t>
+            </a:r>
+            <a:pPr algn="r" indent="0" marL="0">
+              <a:buNone/>
+            </a:pPr>
+            <a:r>
+              <a:rPr lang="en-US" sz="850" b="1" dirty="0">
+                <a:solidFill>
+                  <a:srgbClr val="C62133"/>
+                </a:solidFill>
+                <a:latin typeface="Calibri" pitchFamily="34" charset="0"/>
+                <a:ea typeface="Calibri" pitchFamily="34" charset="-122"/>
+                <a:cs typeface="Calibri" pitchFamily="34" charset="-120"/>
+              </a:rPr>
+              <a:t>21</a:t>
+            </a:r>
+            <a:endParaRPr lang="en-US" sz="850" dirty="0"/>
+          </a:p>
+        </p:txBody>
+      </p:sp>
+    </p:spTree>
+  </p:cSld>
+  <p:clrMapOvr>
+    <a:masterClrMapping/>
+  </p:clrMapOvr>
+</p:sld>
+</file>
+
+<file path=ppt/slides/slide28.xml><?xml version="1.0" encoding="utf-8"?>
+<p:sld xmlns:a="http://schemas.openxmlformats.org/drawingml/2006/main" xmlns:p="http://schemas.openxmlformats.org/presentationml/2006/main" xmlns:r="http://schemas.openxmlformats.org/officeDocument/2006/relationships">
+  <p:cSld>
+    <p:spTree>
+      <p:nvGrpSpPr>
+        <p:cNvPr id="1" name=""/>
+        <p:cNvGrpSpPr/>
+        <p:nvPr/>
+      </p:nvGrpSpPr>
+      <p:grpSpPr/>
+      <p:sp>
+        <p:nvSpPr>
+          <p:cNvPr id="2" name="Text 0"/>
+          <p:cNvSpPr/>
+          <p:nvPr/>
+        </p:nvSpPr>
+        <p:spPr>
+          <a:xfrm>
+            <a:off x="566928" y="329184"/>
+            <a:ext cx="10515600" cy="310896"/>
+          </a:xfrm>
+          <a:prstGeom prst="rect">
+            <a:avLst/>
+          </a:prstGeom>
+          <a:noFill/>
+          <a:ln/>
+        </p:spPr>
+        <p:txBody>
+          <a:bodyPr wrap="square" lIns="0" tIns="0" rIns="0" bIns="0" rtlCol="0" anchor="ctr"/>
+          <a:lstStyle/>
+          <a:p>
+            <a:pPr algn="l" indent="0" marL="0">
+              <a:buNone/>
+            </a:pPr>
+            <a:r>
+              <a:rPr lang="en-US" sz="1100" b="1" spc="150" kern="0" dirty="0">
+                <a:solidFill>
+                  <a:srgbClr val="C62133"/>
+                </a:solidFill>
+                <a:latin typeface="Calibri" pitchFamily="34" charset="0"/>
+                <a:ea typeface="Calibri" pitchFamily="34" charset="-122"/>
+                <a:cs typeface="Calibri" pitchFamily="34" charset="-120"/>
+              </a:rPr>
+              <a:t>HEMATOLOGY &amp; COAGULATION   ·   BOARD REVIEW  ·  Q3</a:t>
+            </a:r>
+            <a:endParaRPr lang="en-US" sz="1100" dirty="0"/>
+          </a:p>
+        </p:txBody>
+      </p:sp>
+      <p:sp>
+        <p:nvSpPr>
+          <p:cNvPr id="3" name="Text 1"/>
+          <p:cNvSpPr/>
+          <p:nvPr/>
+        </p:nvSpPr>
+        <p:spPr>
+          <a:xfrm>
+            <a:off x="566928" y="713232"/>
+            <a:ext cx="11064240" cy="749808"/>
+          </a:xfrm>
+          <a:prstGeom prst="rect">
+            <a:avLst/>
+          </a:prstGeom>
+          <a:noFill/>
+          <a:ln/>
+        </p:spPr>
+        <p:txBody>
+          <a:bodyPr wrap="square" lIns="0" tIns="0" rIns="0" bIns="0" rtlCol="0" anchor="ctr"/>
+          <a:lstStyle/>
+          <a:p>
+            <a:pPr algn="l" indent="0" marL="0">
+              <a:buNone/>
+            </a:pPr>
+            <a:r>
+              <a:rPr lang="en-US" sz="2600" b="1" dirty="0">
+                <a:solidFill>
+                  <a:srgbClr val="0E3A5F"/>
+                </a:solidFill>
+                <a:latin typeface="Calibri" pitchFamily="34" charset="0"/>
+                <a:ea typeface="Calibri" pitchFamily="34" charset="-122"/>
+                <a:cs typeface="Calibri" pitchFamily="34" charset="-120"/>
+              </a:rPr>
+              <a:t>Board-Style Review</a:t>
+            </a:r>
+            <a:endParaRPr lang="en-US" sz="2600" dirty="0"/>
+          </a:p>
+        </p:txBody>
+      </p:sp>
+      <p:sp>
+        <p:nvSpPr>
+          <p:cNvPr id="4" name="Text 2"/>
+          <p:cNvSpPr/>
+          <p:nvPr/>
+        </p:nvSpPr>
+        <p:spPr>
+          <a:xfrm>
+            <a:off x="566928" y="1417320"/>
+            <a:ext cx="11057839" cy="914400"/>
+          </a:xfrm>
+          <a:prstGeom prst="rect">
+            <a:avLst/>
+          </a:prstGeom>
+          <a:noFill/>
+          <a:ln/>
+        </p:spPr>
+        <p:txBody>
+          <a:bodyPr wrap="square" lIns="0" tIns="0" rIns="0" bIns="0" rtlCol="0" anchor="t"/>
+          <a:lstStyle/>
+          <a:p>
+            <a:pPr algn="l" indent="0" marL="0">
+              <a:lnSpc>
+                <a:spcPct val="105000"/>
+              </a:lnSpc>
+              <a:buNone/>
+            </a:pPr>
+            <a:r>
+              <a:rPr lang="en-US" sz="1450" b="1" dirty="0">
+                <a:solidFill>
+                  <a:srgbClr val="1B2A38"/>
+                </a:solidFill>
+                <a:latin typeface="Calibri" pitchFamily="34" charset="0"/>
+                <a:ea typeface="Calibri" pitchFamily="34" charset="-122"/>
+                <a:cs typeface="Calibri" pitchFamily="34" charset="-120"/>
+              </a:rPr>
+              <a:t>The principal danger of heparin-induced thrombocytopenia (HIT) is:</a:t>
+            </a:r>
+            <a:endParaRPr lang="en-US" sz="1450" dirty="0"/>
+          </a:p>
+        </p:txBody>
+      </p:sp>
+      <p:sp>
+        <p:nvSpPr>
+          <p:cNvPr id="5" name="Text 3"/>
+          <p:cNvSpPr/>
+          <p:nvPr/>
+        </p:nvSpPr>
+        <p:spPr>
+          <a:xfrm>
+            <a:off x="658368" y="2395728"/>
+            <a:ext cx="6192390" cy="3017520"/>
+          </a:xfrm>
+          <a:prstGeom prst="rect">
+            <a:avLst/>
+          </a:prstGeom>
+          <a:noFill/>
+          <a:ln/>
+        </p:spPr>
+        <p:txBody>
+          <a:bodyPr wrap="square" lIns="0" tIns="0" rIns="0" bIns="0" rtlCol="0" anchor="t"/>
+          <a:lstStyle/>
+          <a:p>
+            <a:pPr algn="l" indent="0" marL="0">
+              <a:spcAft>
+                <a:spcPts val="600"/>
+              </a:spcAft>
+              <a:buNone/>
+            </a:pPr>
+            <a:r>
+              <a:rPr lang="en-US" sz="1350" dirty="0">
+                <a:solidFill>
+                  <a:srgbClr val="33444F"/>
+                </a:solidFill>
+                <a:latin typeface="Calibri" pitchFamily="34" charset="0"/>
+                <a:ea typeface="Calibri" pitchFamily="34" charset="-122"/>
+                <a:cs typeface="Calibri" pitchFamily="34" charset="-120"/>
+              </a:rPr>
+              <a:t>A. Bleeding</a:t>
+            </a:r>
+            <a:endParaRPr lang="en-US" sz="1350" dirty="0"/>
+          </a:p>
+          <a:p>
+            <a:pPr algn="l" indent="0" marL="0">
+              <a:spcAft>
+                <a:spcPts val="600"/>
+              </a:spcAft>
+              <a:buNone/>
+            </a:pPr>
+            <a:r>
+              <a:rPr lang="en-US" sz="1350" b="1" dirty="0">
+                <a:solidFill>
+                  <a:srgbClr val="8E1622"/>
+                </a:solidFill>
+                <a:latin typeface="Calibri" pitchFamily="34" charset="0"/>
+                <a:ea typeface="Calibri" pitchFamily="34" charset="-122"/>
+                <a:cs typeface="Calibri" pitchFamily="34" charset="-120"/>
+              </a:rPr>
+              <a:t>B. Thrombosis</a:t>
+            </a:r>
+            <a:endParaRPr lang="en-US" sz="1350" dirty="0"/>
+          </a:p>
+          <a:p>
+            <a:pPr algn="l" indent="0" marL="0">
+              <a:spcAft>
+                <a:spcPts val="600"/>
+              </a:spcAft>
+              <a:buNone/>
+            </a:pPr>
+            <a:r>
+              <a:rPr lang="en-US" sz="1350" dirty="0">
+                <a:solidFill>
+                  <a:srgbClr val="33444F"/>
+                </a:solidFill>
+                <a:latin typeface="Calibri" pitchFamily="34" charset="0"/>
+                <a:ea typeface="Calibri" pitchFamily="34" charset="-122"/>
+                <a:cs typeface="Calibri" pitchFamily="34" charset="-120"/>
+              </a:rPr>
+              <a:t>C. Hemolysis</a:t>
+            </a:r>
+            <a:endParaRPr lang="en-US" sz="1350" dirty="0"/>
+          </a:p>
+          <a:p>
+            <a:pPr algn="l" indent="0" marL="0">
+              <a:spcAft>
+                <a:spcPts val="600"/>
+              </a:spcAft>
+              <a:buNone/>
+            </a:pPr>
+            <a:r>
+              <a:rPr lang="en-US" sz="1350" dirty="0">
+                <a:solidFill>
+                  <a:srgbClr val="33444F"/>
+                </a:solidFill>
+                <a:latin typeface="Calibri" pitchFamily="34" charset="0"/>
+                <a:ea typeface="Calibri" pitchFamily="34" charset="-122"/>
+                <a:cs typeface="Calibri" pitchFamily="34" charset="-120"/>
+              </a:rPr>
+              <a:t>D. Iron overload</a:t>
+            </a:r>
+            <a:endParaRPr lang="en-US" sz="1350" dirty="0"/>
+          </a:p>
+          <a:p>
+            <a:pPr algn="l" indent="0" marL="0">
+              <a:spcAft>
+                <a:spcPts val="600"/>
+              </a:spcAft>
+              <a:buNone/>
+            </a:pPr>
+            <a:r>
+              <a:rPr lang="en-US" sz="1350" dirty="0">
+                <a:solidFill>
+                  <a:srgbClr val="33444F"/>
+                </a:solidFill>
+                <a:latin typeface="Calibri" pitchFamily="34" charset="0"/>
+                <a:ea typeface="Calibri" pitchFamily="34" charset="-122"/>
+                <a:cs typeface="Calibri" pitchFamily="34" charset="-120"/>
+              </a:rPr>
+              <a:t>E. Marrow failure</a:t>
+            </a:r>
+            <a:endParaRPr lang="en-US" sz="1350" dirty="0"/>
+          </a:p>
+        </p:txBody>
+      </p:sp>
+      <p:sp>
+        <p:nvSpPr>
+          <p:cNvPr id="6" name="Shape 4"/>
+          <p:cNvSpPr/>
+          <p:nvPr/>
+        </p:nvSpPr>
+        <p:spPr>
+          <a:xfrm>
+            <a:off x="7201632" y="2395728"/>
+            <a:ext cx="4423136" cy="3246120"/>
+          </a:xfrm>
+          <a:prstGeom prst="roundRect">
+            <a:avLst>
+              <a:gd name="adj" fmla="val 2535"/>
+            </a:avLst>
+          </a:prstGeom>
+          <a:solidFill>
+            <a:srgbClr val="FBEAEC"/>
+          </a:solidFill>
+          <a:ln/>
+          <a:effectLst>
+            <a:outerShdw sx="100000" sy="100000" kx="0" ky="0" algn="bl" rotWithShape="0" blurRad="88900" dist="25400" dir="5400000">
+              <a:srgbClr val="22303C">
+                <a:alpha val="12000"/>
+              </a:srgbClr>
+            </a:outerShdw>
+          </a:effectLst>
+        </p:spPr>
+        <p:txBody>
+          <a:bodyPr/>
+          <a:p/>
+        </p:txBody>
+      </p:sp>
+      <p:sp>
+        <p:nvSpPr>
+          <p:cNvPr id="7" name="Text 5"/>
+          <p:cNvSpPr/>
+          <p:nvPr/>
+        </p:nvSpPr>
+        <p:spPr>
+          <a:xfrm>
+            <a:off x="7439376" y="2578608"/>
+            <a:ext cx="3965936" cy="457200"/>
+          </a:xfrm>
+          <a:prstGeom prst="rect">
+            <a:avLst/>
+          </a:prstGeom>
+          <a:noFill/>
+          <a:ln/>
+        </p:spPr>
+        <p:txBody>
+          <a:bodyPr wrap="square" lIns="0" tIns="0" rIns="0" bIns="0" rtlCol="0" anchor="ctr"/>
+          <a:lstStyle/>
+          <a:p>
+            <a:pPr indent="0" marL="0">
+              <a:buNone/>
+            </a:pPr>
+            <a:r>
+              <a:rPr lang="en-US" sz="1500" b="1" dirty="0">
+                <a:solidFill>
+                  <a:srgbClr val="C62133"/>
+                </a:solidFill>
+                <a:latin typeface="Calibri" pitchFamily="34" charset="0"/>
+                <a:ea typeface="Calibri" pitchFamily="34" charset="-122"/>
+                <a:cs typeface="Calibri" pitchFamily="34" charset="-120"/>
+              </a:rPr>
+              <a:t>ANSWER  </a:t>
+            </a:r>
+            <a:pPr indent="0" marL="0">
+              <a:buNone/>
+            </a:pPr>
+            <a:r>
+              <a:rPr lang="en-US" sz="1500" b="1" dirty="0">
+                <a:solidFill>
+                  <a:srgbClr val="1B2A38"/>
+                </a:solidFill>
+                <a:latin typeface="Calibri" pitchFamily="34" charset="0"/>
+                <a:ea typeface="Calibri" pitchFamily="34" charset="-122"/>
+                <a:cs typeface="Calibri" pitchFamily="34" charset="-120"/>
+              </a:rPr>
+              <a:t>B — Thrombosis</a:t>
+            </a:r>
+            <a:endParaRPr lang="en-US" sz="1500" dirty="0"/>
+          </a:p>
+        </p:txBody>
+      </p:sp>
+      <p:sp>
+        <p:nvSpPr>
+          <p:cNvPr id="8" name="Text 6"/>
+          <p:cNvSpPr/>
+          <p:nvPr/>
+        </p:nvSpPr>
+        <p:spPr>
+          <a:xfrm>
+            <a:off x="7439376" y="3127248"/>
+            <a:ext cx="3947648" cy="2377440"/>
+          </a:xfrm>
+          <a:prstGeom prst="rect">
+            <a:avLst/>
+          </a:prstGeom>
+          <a:noFill/>
+          <a:ln/>
+        </p:spPr>
+        <p:txBody>
+          <a:bodyPr wrap="square" lIns="0" tIns="0" rIns="0" bIns="0" rtlCol="0" anchor="t"/>
+          <a:lstStyle/>
+          <a:p>
+            <a:pPr algn="l" indent="0" marL="0">
+              <a:lnSpc>
+                <a:spcPct val="108000"/>
+              </a:lnSpc>
+              <a:buNone/>
+            </a:pPr>
+            <a:r>
+              <a:rPr lang="en-US" sz="1250" dirty="0">
+                <a:solidFill>
+                  <a:srgbClr val="33444F"/>
+                </a:solidFill>
+                <a:latin typeface="Calibri" pitchFamily="34" charset="0"/>
+                <a:ea typeface="Calibri" pitchFamily="34" charset="-122"/>
+                <a:cs typeface="Calibri" pitchFamily="34" charset="-120"/>
+              </a:rPr>
+              <a:t>HIT is prothrombotic; management is to stop heparin and start a non-heparin anticoagulant, not to transfuse platelets.</a:t>
+            </a:r>
+            <a:endParaRPr lang="en-US" sz="1250" dirty="0"/>
+          </a:p>
+        </p:txBody>
+      </p:sp>
+      <p:sp>
+        <p:nvSpPr>
+          <p:cNvPr id="9" name="Text 7"/>
+          <p:cNvSpPr/>
+          <p:nvPr/>
+        </p:nvSpPr>
+        <p:spPr>
+          <a:xfrm>
+            <a:off x="566928" y="6473952"/>
+            <a:ext cx="7772400" cy="274320"/>
+          </a:xfrm>
+          <a:prstGeom prst="rect">
+            <a:avLst/>
+          </a:prstGeom>
+          <a:noFill/>
+          <a:ln/>
+        </p:spPr>
+        <p:txBody>
+          <a:bodyPr wrap="square" lIns="0" tIns="0" rIns="0" bIns="0" rtlCol="0" anchor="ctr"/>
+          <a:lstStyle/>
+          <a:p>
+            <a:pPr algn="l" indent="0" marL="0">
+              <a:buNone/>
+            </a:pPr>
+            <a:r>
+              <a:rPr lang="en-US" sz="850" dirty="0">
+                <a:solidFill>
+                  <a:srgbClr val="9AA8B4"/>
+                </a:solidFill>
+                <a:latin typeface="Calibri" pitchFamily="34" charset="0"/>
+                <a:ea typeface="Calibri" pitchFamily="34" charset="-122"/>
+                <a:cs typeface="Calibri" pitchFamily="34" charset="-120"/>
+              </a:rPr>
+              <a:t>Makassed General Hospital  ·  Department of Laboratory Medicine</a:t>
+            </a:r>
+            <a:endParaRPr lang="en-US" sz="850" dirty="0"/>
+          </a:p>
+        </p:txBody>
+      </p:sp>
+      <p:sp>
+        <p:nvSpPr>
+          <p:cNvPr id="10" name="Text 8"/>
+          <p:cNvSpPr/>
+          <p:nvPr/>
+        </p:nvSpPr>
+        <p:spPr>
+          <a:xfrm>
+            <a:off x="9814255" y="6473952"/>
+            <a:ext cx="1828800" cy="274320"/>
+          </a:xfrm>
+          <a:prstGeom prst="rect">
+            <a:avLst/>
+          </a:prstGeom>
+          <a:noFill/>
+          <a:ln/>
+        </p:spPr>
+        <p:txBody>
+          <a:bodyPr wrap="square" lIns="0" tIns="0" rIns="0" bIns="0" rtlCol="0" anchor="ctr"/>
+          <a:lstStyle/>
+          <a:p>
+            <a:pPr algn="r" indent="0" marL="0">
+              <a:buNone/>
+            </a:pPr>
+            <a:r>
+              <a:rPr lang="en-US" sz="850" dirty="0">
+                <a:solidFill>
+                  <a:srgbClr val="9AA8B4"/>
+                </a:solidFill>
+                <a:latin typeface="Calibri" pitchFamily="34" charset="0"/>
+                <a:ea typeface="Calibri" pitchFamily="34" charset="-122"/>
+                <a:cs typeface="Calibri" pitchFamily="34" charset="-120"/>
+              </a:rPr>
+              <a:t>CP Lecture Series</a:t>
+            </a:r>
+            <a:pPr algn="r" indent="0" marL="0">
+              <a:buNone/>
+            </a:pPr>
+            <a:r>
+              <a:rPr lang="en-US" sz="850" dirty="0">
+                <a:solidFill>
+                  <a:srgbClr val="DCE4EC"/>
+                </a:solidFill>
+                <a:latin typeface="Calibri" pitchFamily="34" charset="0"/>
+                <a:ea typeface="Calibri" pitchFamily="34" charset="-122"/>
+                <a:cs typeface="Calibri" pitchFamily="34" charset="-120"/>
+              </a:rPr>
+              <a:t>   ·   </a:t>
+            </a:r>
+            <a:pPr algn="r" indent="0" marL="0">
+              <a:buNone/>
+            </a:pPr>
+            <a:r>
+              <a:rPr lang="en-US" sz="850" b="1" dirty="0">
+                <a:solidFill>
+                  <a:srgbClr val="C62133"/>
+                </a:solidFill>
+                <a:latin typeface="Calibri" pitchFamily="34" charset="0"/>
+                <a:ea typeface="Calibri" pitchFamily="34" charset="-122"/>
+                <a:cs typeface="Calibri" pitchFamily="34" charset="-120"/>
+              </a:rPr>
+              <a:t>20</a:t>
+            </a:r>
+            <a:endParaRPr lang="en-US" sz="850" dirty="0"/>
+          </a:p>
+        </p:txBody>
+      </p:sp>
+    </p:spTree>
+  </p:cSld>
+  <p:clrMapOvr>
+    <a:masterClrMapping/>
+  </p:clrMapOvr>
+</p:sld>
+</file>
+
+<file path=ppt/slides/slide29.xml><?xml version="1.0" encoding="utf-8"?>
+<p:sld xmlns:a="http://schemas.openxmlformats.org/drawingml/2006/main" xmlns:p="http://schemas.openxmlformats.org/presentationml/2006/main" xmlns:r="http://schemas.openxmlformats.org/officeDocument/2006/relationships">
+  <p:cSld>
+    <p:spTree>
+      <p:nvGrpSpPr>
+        <p:cNvPr id="1" name=""/>
+        <p:cNvGrpSpPr/>
+        <p:nvPr/>
+      </p:nvGrpSpPr>
+      <p:grpSpPr/>
+      <p:sp>
+        <p:nvSpPr>
+          <p:cNvPr id="2" name="Text 0"/>
+          <p:cNvSpPr/>
+          <p:nvPr/>
+        </p:nvSpPr>
+        <p:spPr>
+          <a:xfrm>
+            <a:off x="566928" y="329184"/>
+            <a:ext cx="10515600" cy="310896"/>
+          </a:xfrm>
+          <a:prstGeom prst="rect">
+            <a:avLst/>
+          </a:prstGeom>
+          <a:noFill/>
+          <a:ln/>
+        </p:spPr>
+        <p:txBody>
+          <a:bodyPr wrap="square" lIns="0" tIns="0" rIns="0" bIns="0" rtlCol="0" anchor="ctr"/>
+          <a:lstStyle/>
+          <a:p>
+            <a:pPr algn="l" indent="0" marL="0">
+              <a:buNone/>
+            </a:pPr>
+            <a:r>
+              <a:rPr lang="en-US" sz="1100" b="1" spc="150" kern="0" dirty="0">
+                <a:solidFill>
+                  <a:srgbClr val="C62133"/>
+                </a:solidFill>
+                <a:latin typeface="Calibri" pitchFamily="34" charset="0"/>
+                <a:ea typeface="Calibri" pitchFamily="34" charset="-122"/>
+                <a:cs typeface="Calibri" pitchFamily="34" charset="-120"/>
+              </a:rPr>
+              <a:t>HEMATOLOGY &amp; COAGULATION   ·   BOARD REVIEW  ·  Q2</a:t>
+            </a:r>
+            <a:endParaRPr lang="en-US" sz="1100" dirty="0"/>
+          </a:p>
+        </p:txBody>
+      </p:sp>
+      <p:sp>
+        <p:nvSpPr>
+          <p:cNvPr id="3" name="Text 1"/>
+          <p:cNvSpPr/>
+          <p:nvPr/>
+        </p:nvSpPr>
+        <p:spPr>
+          <a:xfrm>
+            <a:off x="566928" y="713232"/>
+            <a:ext cx="11064240" cy="749808"/>
+          </a:xfrm>
+          <a:prstGeom prst="rect">
+            <a:avLst/>
+          </a:prstGeom>
+          <a:noFill/>
+          <a:ln/>
+        </p:spPr>
+        <p:txBody>
+          <a:bodyPr wrap="square" lIns="0" tIns="0" rIns="0" bIns="0" rtlCol="0" anchor="ctr"/>
+          <a:lstStyle/>
+          <a:p>
+            <a:pPr algn="l" indent="0" marL="0">
+              <a:buNone/>
+            </a:pPr>
+            <a:r>
+              <a:rPr lang="en-US" sz="2600" b="1" dirty="0">
+                <a:solidFill>
+                  <a:srgbClr val="0E3A5F"/>
+                </a:solidFill>
+                <a:latin typeface="Calibri" pitchFamily="34" charset="0"/>
+                <a:ea typeface="Calibri" pitchFamily="34" charset="-122"/>
+                <a:cs typeface="Calibri" pitchFamily="34" charset="-120"/>
+              </a:rPr>
+              <a:t>Board-Style Review</a:t>
+            </a:r>
+            <a:endParaRPr lang="en-US" sz="2600" dirty="0"/>
+          </a:p>
+        </p:txBody>
+      </p:sp>
+      <p:sp>
+        <p:nvSpPr>
+          <p:cNvPr id="4" name="Text 2"/>
+          <p:cNvSpPr/>
+          <p:nvPr/>
+        </p:nvSpPr>
+        <p:spPr>
+          <a:xfrm>
+            <a:off x="566928" y="1417320"/>
+            <a:ext cx="11057839" cy="914400"/>
+          </a:xfrm>
+          <a:prstGeom prst="rect">
+            <a:avLst/>
+          </a:prstGeom>
+          <a:noFill/>
+          <a:ln/>
+        </p:spPr>
+        <p:txBody>
+          <a:bodyPr wrap="square" lIns="0" tIns="0" rIns="0" bIns="0" rtlCol="0" anchor="t"/>
+          <a:lstStyle/>
+          <a:p>
+            <a:pPr algn="l" indent="0" marL="0">
+              <a:lnSpc>
+                <a:spcPct val="105000"/>
+              </a:lnSpc>
+              <a:buNone/>
+            </a:pPr>
+            <a:r>
+              <a:rPr lang="en-US" sz="1450" b="1" dirty="0">
+                <a:solidFill>
+                  <a:srgbClr val="1B2A38"/>
+                </a:solidFill>
+                <a:latin typeface="Calibri" pitchFamily="34" charset="0"/>
+                <a:ea typeface="Calibri" pitchFamily="34" charset="-122"/>
+                <a:cs typeface="Calibri" pitchFamily="34" charset="-120"/>
+              </a:rPr>
+              <a:t>Thrombocytopenia with schistocytes and microangiopathic hemolysis suggests:</a:t>
+            </a:r>
+            <a:endParaRPr lang="en-US" sz="1450" dirty="0"/>
+          </a:p>
+        </p:txBody>
+      </p:sp>
+      <p:sp>
+        <p:nvSpPr>
+          <p:cNvPr id="5" name="Text 3"/>
+          <p:cNvSpPr/>
+          <p:nvPr/>
+        </p:nvSpPr>
+        <p:spPr>
+          <a:xfrm>
+            <a:off x="658368" y="2395728"/>
+            <a:ext cx="6192390" cy="3017520"/>
+          </a:xfrm>
+          <a:prstGeom prst="rect">
+            <a:avLst/>
+          </a:prstGeom>
+          <a:noFill/>
+          <a:ln/>
+        </p:spPr>
+        <p:txBody>
+          <a:bodyPr wrap="square" lIns="0" tIns="0" rIns="0" bIns="0" rtlCol="0" anchor="t"/>
+          <a:lstStyle/>
+          <a:p>
+            <a:pPr algn="l" indent="0" marL="0">
+              <a:spcAft>
+                <a:spcPts val="600"/>
+              </a:spcAft>
+              <a:buNone/>
+            </a:pPr>
+            <a:r>
+              <a:rPr lang="en-US" sz="1350" dirty="0">
+                <a:solidFill>
+                  <a:srgbClr val="33444F"/>
+                </a:solidFill>
+                <a:latin typeface="Calibri" pitchFamily="34" charset="0"/>
+                <a:ea typeface="Calibri" pitchFamily="34" charset="-122"/>
+                <a:cs typeface="Calibri" pitchFamily="34" charset="-120"/>
+              </a:rPr>
+              <a:t>A. ITP</a:t>
+            </a:r>
+            <a:endParaRPr lang="en-US" sz="1350" dirty="0"/>
+          </a:p>
+          <a:p>
+            <a:pPr algn="l" indent="0" marL="0">
+              <a:spcAft>
+                <a:spcPts val="600"/>
+              </a:spcAft>
+              <a:buNone/>
+            </a:pPr>
+            <a:r>
+              <a:rPr lang="en-US" sz="1350" b="1" dirty="0">
+                <a:solidFill>
+                  <a:srgbClr val="8E1622"/>
+                </a:solidFill>
+                <a:latin typeface="Calibri" pitchFamily="34" charset="0"/>
+                <a:ea typeface="Calibri" pitchFamily="34" charset="-122"/>
+                <a:cs typeface="Calibri" pitchFamily="34" charset="-120"/>
+              </a:rPr>
+              <a:t>B. A thrombotic microangiopathy (e.g., TTP/HUS, DIC)</a:t>
+            </a:r>
+            <a:endParaRPr lang="en-US" sz="1350" dirty="0"/>
+          </a:p>
+          <a:p>
+            <a:pPr algn="l" indent="0" marL="0">
+              <a:spcAft>
+                <a:spcPts val="600"/>
+              </a:spcAft>
+              <a:buNone/>
+            </a:pPr>
+            <a:r>
+              <a:rPr lang="en-US" sz="1350" dirty="0">
+                <a:solidFill>
+                  <a:srgbClr val="33444F"/>
+                </a:solidFill>
+                <a:latin typeface="Calibri" pitchFamily="34" charset="0"/>
+                <a:ea typeface="Calibri" pitchFamily="34" charset="-122"/>
+                <a:cs typeface="Calibri" pitchFamily="34" charset="-120"/>
+              </a:rPr>
+              <a:t>C. Pseudothrombocytopenia</a:t>
+            </a:r>
+            <a:endParaRPr lang="en-US" sz="1350" dirty="0"/>
+          </a:p>
+          <a:p>
+            <a:pPr algn="l" indent="0" marL="0">
+              <a:spcAft>
+                <a:spcPts val="600"/>
+              </a:spcAft>
+              <a:buNone/>
+            </a:pPr>
+            <a:r>
+              <a:rPr lang="en-US" sz="1350" dirty="0">
+                <a:solidFill>
+                  <a:srgbClr val="33444F"/>
+                </a:solidFill>
+                <a:latin typeface="Calibri" pitchFamily="34" charset="0"/>
+                <a:ea typeface="Calibri" pitchFamily="34" charset="-122"/>
+                <a:cs typeface="Calibri" pitchFamily="34" charset="-120"/>
+              </a:rPr>
+              <a:t>D. Bernard-Soulier syndrome</a:t>
+            </a:r>
+            <a:endParaRPr lang="en-US" sz="1350" dirty="0"/>
+          </a:p>
+          <a:p>
+            <a:pPr algn="l" indent="0" marL="0">
+              <a:spcAft>
+                <a:spcPts val="600"/>
+              </a:spcAft>
+              <a:buNone/>
+            </a:pPr>
+            <a:r>
+              <a:rPr lang="en-US" sz="1350" dirty="0">
+                <a:solidFill>
+                  <a:srgbClr val="33444F"/>
+                </a:solidFill>
+                <a:latin typeface="Calibri" pitchFamily="34" charset="0"/>
+                <a:ea typeface="Calibri" pitchFamily="34" charset="-122"/>
+                <a:cs typeface="Calibri" pitchFamily="34" charset="-120"/>
+              </a:rPr>
+              <a:t>E. Iron deficiency</a:t>
+            </a:r>
+            <a:endParaRPr lang="en-US" sz="1350" dirty="0"/>
+          </a:p>
+        </p:txBody>
+      </p:sp>
+      <p:sp>
+        <p:nvSpPr>
+          <p:cNvPr id="6" name="Shape 4"/>
+          <p:cNvSpPr/>
+          <p:nvPr/>
+        </p:nvSpPr>
+        <p:spPr>
+          <a:xfrm>
+            <a:off x="7201632" y="2395728"/>
+            <a:ext cx="4423136" cy="3246120"/>
+          </a:xfrm>
+          <a:prstGeom prst="roundRect">
+            <a:avLst>
+              <a:gd name="adj" fmla="val 2535"/>
+            </a:avLst>
+          </a:prstGeom>
+          <a:solidFill>
+            <a:srgbClr val="FBEAEC"/>
+          </a:solidFill>
+          <a:ln/>
+          <a:effectLst>
+            <a:outerShdw sx="100000" sy="100000" kx="0" ky="0" algn="bl" rotWithShape="0" blurRad="88900" dist="25400" dir="5400000">
+              <a:srgbClr val="22303C">
+                <a:alpha val="12000"/>
+              </a:srgbClr>
+            </a:outerShdw>
+          </a:effectLst>
+        </p:spPr>
+        <p:txBody>
+          <a:bodyPr/>
+          <a:p/>
+        </p:txBody>
+      </p:sp>
+      <p:sp>
+        <p:nvSpPr>
+          <p:cNvPr id="7" name="Text 5"/>
+          <p:cNvSpPr/>
+          <p:nvPr/>
+        </p:nvSpPr>
+        <p:spPr>
+          <a:xfrm>
+            <a:off x="7439376" y="2578608"/>
+            <a:ext cx="3965936" cy="457200"/>
+          </a:xfrm>
+          <a:prstGeom prst="rect">
+            <a:avLst/>
+          </a:prstGeom>
+          <a:noFill/>
+          <a:ln/>
+        </p:spPr>
+        <p:txBody>
+          <a:bodyPr wrap="square" lIns="0" tIns="0" rIns="0" bIns="0" rtlCol="0" anchor="ctr"/>
+          <a:lstStyle/>
+          <a:p>
+            <a:pPr indent="0" marL="0">
+              <a:buNone/>
+            </a:pPr>
+            <a:r>
+              <a:rPr lang="en-US" sz="1500" b="1" dirty="0">
+                <a:solidFill>
+                  <a:srgbClr val="C62133"/>
+                </a:solidFill>
+                <a:latin typeface="Calibri" pitchFamily="34" charset="0"/>
+                <a:ea typeface="Calibri" pitchFamily="34" charset="-122"/>
+                <a:cs typeface="Calibri" pitchFamily="34" charset="-120"/>
+              </a:rPr>
+              <a:t>ANSWER  </a:t>
+            </a:r>
+            <a:pPr indent="0" marL="0">
+              <a:buNone/>
+            </a:pPr>
+            <a:r>
+              <a:rPr lang="en-US" sz="1500" b="1" dirty="0">
+                <a:solidFill>
+                  <a:srgbClr val="1B2A38"/>
+                </a:solidFill>
+                <a:latin typeface="Calibri" pitchFamily="34" charset="0"/>
+                <a:ea typeface="Calibri" pitchFamily="34" charset="-122"/>
+                <a:cs typeface="Calibri" pitchFamily="34" charset="-120"/>
+              </a:rPr>
+              <a:t>B — Thrombotic microangiopathy</a:t>
+            </a:r>
+            <a:endParaRPr lang="en-US" sz="1500" dirty="0"/>
+          </a:p>
+        </p:txBody>
+      </p:sp>
+      <p:sp>
+        <p:nvSpPr>
+          <p:cNvPr id="8" name="Text 6"/>
+          <p:cNvSpPr/>
+          <p:nvPr/>
+        </p:nvSpPr>
+        <p:spPr>
+          <a:xfrm>
+            <a:off x="7439376" y="3127248"/>
+            <a:ext cx="3947648" cy="2377440"/>
+          </a:xfrm>
+          <a:prstGeom prst="rect">
+            <a:avLst/>
+          </a:prstGeom>
+          <a:noFill/>
+          <a:ln/>
+        </p:spPr>
+        <p:txBody>
+          <a:bodyPr wrap="square" lIns="0" tIns="0" rIns="0" bIns="0" rtlCol="0" anchor="t"/>
+          <a:lstStyle/>
+          <a:p>
+            <a:pPr algn="l" indent="0" marL="0">
+              <a:lnSpc>
+                <a:spcPct val="108000"/>
+              </a:lnSpc>
+              <a:buNone/>
+            </a:pPr>
+            <a:r>
+              <a:rPr lang="en-US" sz="1250" dirty="0">
+                <a:solidFill>
+                  <a:srgbClr val="33444F"/>
+                </a:solidFill>
+                <a:latin typeface="Calibri" pitchFamily="34" charset="0"/>
+                <a:ea typeface="Calibri" pitchFamily="34" charset="-122"/>
+                <a:cs typeface="Calibri" pitchFamily="34" charset="-120"/>
+              </a:rPr>
+              <a:t>Schistocytes with thrombocytopenia indicate a microangiopathic process requiring urgent evaluation.</a:t>
+            </a:r>
+            <a:endParaRPr lang="en-US" sz="1250" dirty="0"/>
+          </a:p>
+        </p:txBody>
+      </p:sp>
+      <p:sp>
+        <p:nvSpPr>
+          <p:cNvPr id="9" name="Text 7"/>
+          <p:cNvSpPr/>
+          <p:nvPr/>
+        </p:nvSpPr>
+        <p:spPr>
+          <a:xfrm>
+            <a:off x="566928" y="6473952"/>
+            <a:ext cx="7772400" cy="274320"/>
+          </a:xfrm>
+          <a:prstGeom prst="rect">
+            <a:avLst/>
+          </a:prstGeom>
+          <a:noFill/>
+          <a:ln/>
+        </p:spPr>
+        <p:txBody>
+          <a:bodyPr wrap="square" lIns="0" tIns="0" rIns="0" bIns="0" rtlCol="0" anchor="ctr"/>
+          <a:lstStyle/>
+          <a:p>
+            <a:pPr algn="l" indent="0" marL="0">
+              <a:buNone/>
+            </a:pPr>
+            <a:r>
+              <a:rPr lang="en-US" sz="850" dirty="0">
+                <a:solidFill>
+                  <a:srgbClr val="9AA8B4"/>
+                </a:solidFill>
+                <a:latin typeface="Calibri" pitchFamily="34" charset="0"/>
+                <a:ea typeface="Calibri" pitchFamily="34" charset="-122"/>
+                <a:cs typeface="Calibri" pitchFamily="34" charset="-120"/>
+              </a:rPr>
+              <a:t>Makassed General Hospital  ·  Department of Laboratory Medicine</a:t>
+            </a:r>
+            <a:endParaRPr lang="en-US" sz="850" dirty="0"/>
+          </a:p>
+        </p:txBody>
+      </p:sp>
+      <p:sp>
+        <p:nvSpPr>
+          <p:cNvPr id="10" name="Text 8"/>
+          <p:cNvSpPr/>
+          <p:nvPr/>
+        </p:nvSpPr>
+        <p:spPr>
+          <a:xfrm>
+            <a:off x="9814255" y="6473952"/>
+            <a:ext cx="1828800" cy="274320"/>
+          </a:xfrm>
+          <a:prstGeom prst="rect">
+            <a:avLst/>
+          </a:prstGeom>
+          <a:noFill/>
+          <a:ln/>
+        </p:spPr>
+        <p:txBody>
+          <a:bodyPr wrap="square" lIns="0" tIns="0" rIns="0" bIns="0" rtlCol="0" anchor="ctr"/>
+          <a:lstStyle/>
+          <a:p>
+            <a:pPr algn="r" indent="0" marL="0">
+              <a:buNone/>
+            </a:pPr>
+            <a:r>
+              <a:rPr lang="en-US" sz="850" dirty="0">
+                <a:solidFill>
+                  <a:srgbClr val="9AA8B4"/>
+                </a:solidFill>
+                <a:latin typeface="Calibri" pitchFamily="34" charset="0"/>
+                <a:ea typeface="Calibri" pitchFamily="34" charset="-122"/>
+                <a:cs typeface="Calibri" pitchFamily="34" charset="-120"/>
+              </a:rPr>
+              <a:t>CP Lecture Series</a:t>
+            </a:r>
+            <a:pPr algn="r" indent="0" marL="0">
+              <a:buNone/>
+            </a:pPr>
+            <a:r>
+              <a:rPr lang="en-US" sz="850" dirty="0">
+                <a:solidFill>
+                  <a:srgbClr val="DCE4EC"/>
+                </a:solidFill>
+                <a:latin typeface="Calibri" pitchFamily="34" charset="0"/>
+                <a:ea typeface="Calibri" pitchFamily="34" charset="-122"/>
+                <a:cs typeface="Calibri" pitchFamily="34" charset="-120"/>
+              </a:rPr>
+              <a:t>   ·   </a:t>
+            </a:r>
+            <a:pPr algn="r" indent="0" marL="0">
+              <a:buNone/>
+            </a:pPr>
+            <a:r>
+              <a:rPr lang="en-US" sz="850" b="1" dirty="0">
+                <a:solidFill>
+                  <a:srgbClr val="C62133"/>
+                </a:solidFill>
+                <a:latin typeface="Calibri" pitchFamily="34" charset="0"/>
+                <a:ea typeface="Calibri" pitchFamily="34" charset="-122"/>
+                <a:cs typeface="Calibri" pitchFamily="34" charset="-120"/>
+              </a:rPr>
+              <a:t>19</a:t>
+            </a:r>
+            <a:endParaRPr lang="en-US" sz="850" dirty="0"/>
+          </a:p>
+        </p:txBody>
+      </p:sp>
+    </p:spTree>
+  </p:cSld>
+  <p:clrMapOvr>
+    <a:masterClrMapping/>
+  </p:clrMapOvr>
+</p:sld>
+</file>
+
 <file path=ppt/slides/slide3.xml><?xml version="1.0" encoding="utf-8"?>
 <p:sld xmlns:a="http://schemas.openxmlformats.org/drawingml/2006/main" xmlns:r="http://schemas.openxmlformats.org/officeDocument/2006/relationships" xmlns:p="http://schemas.openxmlformats.org/presentationml/2006/main">
   <p:cSld name="Slide 3">
@@ -12204,6 +13338,10 @@
             </a:outerShdw>
           </a:effectLst>
         </p:spPr>
+        <p:txBody>
+          <a:bodyPr/>
+          <a:p/>
+        </p:txBody>
       </p:sp>
       <p:sp>
         <p:nvSpPr>
@@ -12231,6 +13369,10 @@
             </a:outerShdw>
           </a:effectLst>
         </p:spPr>
+        <p:txBody>
+          <a:bodyPr/>
+          <a:p/>
+        </p:txBody>
       </p:sp>
       <p:sp>
         <p:nvSpPr>
@@ -12338,6 +13480,10 @@
             </a:outerShdw>
           </a:effectLst>
         </p:spPr>
+        <p:txBody>
+          <a:bodyPr/>
+          <a:p/>
+        </p:txBody>
       </p:sp>
       <p:sp>
         <p:nvSpPr>
@@ -12365,6 +13511,10 @@
             </a:outerShdw>
           </a:effectLst>
         </p:spPr>
+        <p:txBody>
+          <a:bodyPr/>
+          <a:p/>
+        </p:txBody>
       </p:sp>
       <p:sp>
         <p:nvSpPr>
@@ -12472,6 +13622,10 @@
             </a:outerShdw>
           </a:effectLst>
         </p:spPr>
+        <p:txBody>
+          <a:bodyPr/>
+          <a:p/>
+        </p:txBody>
       </p:sp>
       <p:sp>
         <p:nvSpPr>
@@ -12499,6 +13653,10 @@
             </a:outerShdw>
           </a:effectLst>
         </p:spPr>
+        <p:txBody>
+          <a:bodyPr/>
+          <a:p/>
+        </p:txBody>
       </p:sp>
       <p:sp>
         <p:nvSpPr>
@@ -12606,6 +13764,10 @@
             </a:outerShdw>
           </a:effectLst>
         </p:spPr>
+        <p:txBody>
+          <a:bodyPr/>
+          <a:p/>
+        </p:txBody>
       </p:sp>
       <p:sp>
         <p:nvSpPr>
@@ -12633,6 +13795,10 @@
             </a:outerShdw>
           </a:effectLst>
         </p:spPr>
+        <p:txBody>
+          <a:bodyPr/>
+          <a:p/>
+        </p:txBody>
       </p:sp>
       <p:sp>
         <p:nvSpPr>
@@ -12740,6 +13906,10 @@
             </a:outerShdw>
           </a:effectLst>
         </p:spPr>
+        <p:txBody>
+          <a:bodyPr/>
+          <a:p/>
+        </p:txBody>
       </p:sp>
       <p:sp>
         <p:nvSpPr>
@@ -12767,6 +13937,10 @@
             </a:outerShdw>
           </a:effectLst>
         </p:spPr>
+        <p:txBody>
+          <a:bodyPr/>
+          <a:p/>
+        </p:txBody>
       </p:sp>
       <p:sp>
         <p:nvSpPr>
@@ -12874,6 +14048,10 @@
             </a:outerShdw>
           </a:effectLst>
         </p:spPr>
+        <p:txBody>
+          <a:bodyPr/>
+          <a:p/>
+        </p:txBody>
       </p:sp>
       <p:sp>
         <p:nvSpPr>
@@ -12901,6 +14079,10 @@
             </a:outerShdw>
           </a:effectLst>
         </p:spPr>
+        <p:txBody>
+          <a:bodyPr/>
+          <a:p/>
+        </p:txBody>
       </p:sp>
       <p:sp>
         <p:nvSpPr>
@@ -13081,6 +14263,500 @@
                 <a:cs typeface="Calibri" pitchFamily="34" charset="-120"/>
               </a:rPr>
               <a:t>3</a:t>
+            </a:r>
+            <a:endParaRPr lang="en-US" sz="850" dirty="0"/>
+          </a:p>
+        </p:txBody>
+      </p:sp>
+    </p:spTree>
+  </p:cSld>
+  <p:clrMapOvr>
+    <a:masterClrMapping/>
+  </p:clrMapOvr>
+</p:sld>
+</file>
+
+<file path=ppt/slides/slide30.xml><?xml version="1.0" encoding="utf-8"?>
+<p:sld xmlns:a="http://schemas.openxmlformats.org/drawingml/2006/main" xmlns:p="http://schemas.openxmlformats.org/presentationml/2006/main" xmlns:r="http://schemas.openxmlformats.org/officeDocument/2006/relationships">
+  <p:cSld>
+    <p:spTree>
+      <p:nvGrpSpPr>
+        <p:cNvPr id="1" name=""/>
+        <p:cNvGrpSpPr/>
+        <p:nvPr/>
+      </p:nvGrpSpPr>
+      <p:grpSpPr/>
+      <p:sp>
+        <p:nvSpPr>
+          <p:cNvPr id="2" name="Text 0"/>
+          <p:cNvSpPr/>
+          <p:nvPr/>
+        </p:nvSpPr>
+        <p:spPr>
+          <a:xfrm>
+            <a:off x="566928" y="329184"/>
+            <a:ext cx="10515600" cy="310896"/>
+          </a:xfrm>
+          <a:prstGeom prst="rect">
+            <a:avLst/>
+          </a:prstGeom>
+          <a:noFill/>
+          <a:ln/>
+        </p:spPr>
+        <p:txBody>
+          <a:bodyPr wrap="square" lIns="0" tIns="0" rIns="0" bIns="0" rtlCol="0" anchor="ctr"/>
+          <a:lstStyle/>
+          <a:p>
+            <a:pPr algn="l" indent="0" marL="0">
+              <a:buNone/>
+            </a:pPr>
+            <a:r>
+              <a:rPr lang="en-US" sz="1100" b="1" spc="150" kern="0" dirty="0">
+                <a:solidFill>
+                  <a:srgbClr val="C62133"/>
+                </a:solidFill>
+                <a:latin typeface="Calibri" pitchFamily="34" charset="0"/>
+                <a:ea typeface="Calibri" pitchFamily="34" charset="-122"/>
+                <a:cs typeface="Calibri" pitchFamily="34" charset="-120"/>
+              </a:rPr>
+              <a:t>HEMATOLOGY &amp; COAGULATION   ·   BOARD REVIEW  ·  Q1</a:t>
+            </a:r>
+            <a:endParaRPr lang="en-US" sz="1100" dirty="0"/>
+          </a:p>
+        </p:txBody>
+      </p:sp>
+      <p:sp>
+        <p:nvSpPr>
+          <p:cNvPr id="3" name="Text 1"/>
+          <p:cNvSpPr/>
+          <p:nvPr/>
+        </p:nvSpPr>
+        <p:spPr>
+          <a:xfrm>
+            <a:off x="566928" y="713232"/>
+            <a:ext cx="11064240" cy="749808"/>
+          </a:xfrm>
+          <a:prstGeom prst="rect">
+            <a:avLst/>
+          </a:prstGeom>
+          <a:noFill/>
+          <a:ln/>
+        </p:spPr>
+        <p:txBody>
+          <a:bodyPr wrap="square" lIns="0" tIns="0" rIns="0" bIns="0" rtlCol="0" anchor="ctr"/>
+          <a:lstStyle/>
+          <a:p>
+            <a:pPr algn="l" indent="0" marL="0">
+              <a:buNone/>
+            </a:pPr>
+            <a:r>
+              <a:rPr lang="en-US" sz="2600" b="1" dirty="0">
+                <a:solidFill>
+                  <a:srgbClr val="0E3A5F"/>
+                </a:solidFill>
+                <a:latin typeface="Calibri" pitchFamily="34" charset="0"/>
+                <a:ea typeface="Calibri" pitchFamily="34" charset="-122"/>
+                <a:cs typeface="Calibri" pitchFamily="34" charset="-120"/>
+              </a:rPr>
+              <a:t>Board-Style Review</a:t>
+            </a:r>
+            <a:endParaRPr lang="en-US" sz="2600" dirty="0"/>
+          </a:p>
+        </p:txBody>
+      </p:sp>
+      <p:sp>
+        <p:nvSpPr>
+          <p:cNvPr id="4" name="Text 2"/>
+          <p:cNvSpPr/>
+          <p:nvPr/>
+        </p:nvSpPr>
+        <p:spPr>
+          <a:xfrm>
+            <a:off x="566928" y="1417320"/>
+            <a:ext cx="11057839" cy="914400"/>
+          </a:xfrm>
+          <a:prstGeom prst="rect">
+            <a:avLst/>
+          </a:prstGeom>
+          <a:noFill/>
+          <a:ln/>
+        </p:spPr>
+        <p:txBody>
+          <a:bodyPr wrap="square" lIns="0" tIns="0" rIns="0" bIns="0" rtlCol="0" anchor="t"/>
+          <a:lstStyle/>
+          <a:p>
+            <a:pPr algn="l" indent="0" marL="0">
+              <a:lnSpc>
+                <a:spcPct val="105000"/>
+              </a:lnSpc>
+              <a:buNone/>
+            </a:pPr>
+            <a:r>
+              <a:rPr lang="en-US" sz="1450" b="1" dirty="0">
+                <a:solidFill>
+                  <a:srgbClr val="1B2A38"/>
+                </a:solidFill>
+                <a:latin typeface="Calibri" pitchFamily="34" charset="0"/>
+                <a:ea typeface="Calibri" pitchFamily="34" charset="-122"/>
+                <a:cs typeface="Calibri" pitchFamily="34" charset="-120"/>
+              </a:rPr>
+              <a:t>The first step when facing a low automated platelet count is to:</a:t>
+            </a:r>
+            <a:endParaRPr lang="en-US" sz="1450" dirty="0"/>
+          </a:p>
+        </p:txBody>
+      </p:sp>
+      <p:sp>
+        <p:nvSpPr>
+          <p:cNvPr id="5" name="Text 3"/>
+          <p:cNvSpPr/>
+          <p:nvPr/>
+        </p:nvSpPr>
+        <p:spPr>
+          <a:xfrm>
+            <a:off x="658368" y="2395728"/>
+            <a:ext cx="6192390" cy="3017520"/>
+          </a:xfrm>
+          <a:prstGeom prst="rect">
+            <a:avLst/>
+          </a:prstGeom>
+          <a:noFill/>
+          <a:ln/>
+        </p:spPr>
+        <p:txBody>
+          <a:bodyPr wrap="square" lIns="0" tIns="0" rIns="0" bIns="0" rtlCol="0" anchor="t"/>
+          <a:lstStyle/>
+          <a:p>
+            <a:pPr algn="l" indent="0" marL="0">
+              <a:spcAft>
+                <a:spcPts val="600"/>
+              </a:spcAft>
+              <a:buNone/>
+            </a:pPr>
+            <a:r>
+              <a:rPr lang="en-US" sz="1350" dirty="0">
+                <a:solidFill>
+                  <a:srgbClr val="33444F"/>
+                </a:solidFill>
+                <a:latin typeface="Calibri" pitchFamily="34" charset="0"/>
+                <a:ea typeface="Calibri" pitchFamily="34" charset="-122"/>
+                <a:cs typeface="Calibri" pitchFamily="34" charset="-120"/>
+              </a:rPr>
+              <a:t>A. Transfuse platelets</a:t>
+            </a:r>
+            <a:endParaRPr lang="en-US" sz="1350" dirty="0"/>
+          </a:p>
+          <a:p>
+            <a:pPr algn="l" indent="0" marL="0">
+              <a:spcAft>
+                <a:spcPts val="600"/>
+              </a:spcAft>
+              <a:buNone/>
+            </a:pPr>
+            <a:r>
+              <a:rPr lang="en-US" sz="1350" b="1" dirty="0">
+                <a:solidFill>
+                  <a:srgbClr val="8E1622"/>
+                </a:solidFill>
+                <a:latin typeface="Calibri" pitchFamily="34" charset="0"/>
+                <a:ea typeface="Calibri" pitchFamily="34" charset="-122"/>
+                <a:cs typeface="Calibri" pitchFamily="34" charset="-120"/>
+              </a:rPr>
+              <a:t>B. Review the smear to exclude clumping</a:t>
+            </a:r>
+            <a:endParaRPr lang="en-US" sz="1350" dirty="0"/>
+          </a:p>
+          <a:p>
+            <a:pPr algn="l" indent="0" marL="0">
+              <a:spcAft>
+                <a:spcPts val="600"/>
+              </a:spcAft>
+              <a:buNone/>
+            </a:pPr>
+            <a:r>
+              <a:rPr lang="en-US" sz="1350" dirty="0">
+                <a:solidFill>
+                  <a:srgbClr val="33444F"/>
+                </a:solidFill>
+                <a:latin typeface="Calibri" pitchFamily="34" charset="0"/>
+                <a:ea typeface="Calibri" pitchFamily="34" charset="-122"/>
+                <a:cs typeface="Calibri" pitchFamily="34" charset="-120"/>
+              </a:rPr>
+              <a:t>C. Start steroids</a:t>
+            </a:r>
+            <a:endParaRPr lang="en-US" sz="1350" dirty="0"/>
+          </a:p>
+          <a:p>
+            <a:pPr algn="l" indent="0" marL="0">
+              <a:spcAft>
+                <a:spcPts val="600"/>
+              </a:spcAft>
+              <a:buNone/>
+            </a:pPr>
+            <a:r>
+              <a:rPr lang="en-US" sz="1350" dirty="0">
+                <a:solidFill>
+                  <a:srgbClr val="33444F"/>
+                </a:solidFill>
+                <a:latin typeface="Calibri" pitchFamily="34" charset="0"/>
+                <a:ea typeface="Calibri" pitchFamily="34" charset="-122"/>
+                <a:cs typeface="Calibri" pitchFamily="34" charset="-120"/>
+              </a:rPr>
+              <a:t>D. Order a marrow biopsy</a:t>
+            </a:r>
+            <a:endParaRPr lang="en-US" sz="1350" dirty="0"/>
+          </a:p>
+          <a:p>
+            <a:pPr algn="l" indent="0" marL="0">
+              <a:spcAft>
+                <a:spcPts val="600"/>
+              </a:spcAft>
+              <a:buNone/>
+            </a:pPr>
+            <a:r>
+              <a:rPr lang="en-US" sz="1350" dirty="0">
+                <a:solidFill>
+                  <a:srgbClr val="33444F"/>
+                </a:solidFill>
+                <a:latin typeface="Calibri" pitchFamily="34" charset="0"/>
+                <a:ea typeface="Calibri" pitchFamily="34" charset="-122"/>
+                <a:cs typeface="Calibri" pitchFamily="34" charset="-120"/>
+              </a:rPr>
+              <a:t>E. Give IVIG</a:t>
+            </a:r>
+            <a:endParaRPr lang="en-US" sz="1350" dirty="0"/>
+          </a:p>
+        </p:txBody>
+      </p:sp>
+      <p:sp>
+        <p:nvSpPr>
+          <p:cNvPr id="6" name="Shape 4"/>
+          <p:cNvSpPr/>
+          <p:nvPr/>
+        </p:nvSpPr>
+        <p:spPr>
+          <a:xfrm>
+            <a:off x="7201632" y="2395728"/>
+            <a:ext cx="4423136" cy="3246120"/>
+          </a:xfrm>
+          <a:prstGeom prst="roundRect">
+            <a:avLst>
+              <a:gd name="adj" fmla="val 2535"/>
+            </a:avLst>
+          </a:prstGeom>
+          <a:solidFill>
+            <a:srgbClr val="FBEAEC"/>
+          </a:solidFill>
+          <a:ln/>
+          <a:effectLst>
+            <a:outerShdw sx="100000" sy="100000" kx="0" ky="0" algn="bl" rotWithShape="0" blurRad="88900" dist="25400" dir="5400000">
+              <a:srgbClr val="22303C">
+                <a:alpha val="12000"/>
+              </a:srgbClr>
+            </a:outerShdw>
+          </a:effectLst>
+        </p:spPr>
+        <p:txBody>
+          <a:bodyPr/>
+          <a:p/>
+        </p:txBody>
+      </p:sp>
+      <p:sp>
+        <p:nvSpPr>
+          <p:cNvPr id="7" name="Text 5"/>
+          <p:cNvSpPr/>
+          <p:nvPr/>
+        </p:nvSpPr>
+        <p:spPr>
+          <a:xfrm>
+            <a:off x="7439376" y="2578608"/>
+            <a:ext cx="3965936" cy="457200"/>
+          </a:xfrm>
+          <a:prstGeom prst="rect">
+            <a:avLst/>
+          </a:prstGeom>
+          <a:noFill/>
+          <a:ln/>
+        </p:spPr>
+        <p:txBody>
+          <a:bodyPr wrap="square" lIns="0" tIns="0" rIns="0" bIns="0" rtlCol="0" anchor="ctr"/>
+          <a:lstStyle/>
+          <a:p>
+            <a:pPr indent="0" marL="0">
+              <a:buNone/>
+            </a:pPr>
+            <a:r>
+              <a:rPr lang="en-US" sz="1500" b="1" dirty="0">
+                <a:solidFill>
+                  <a:srgbClr val="C62133"/>
+                </a:solidFill>
+                <a:latin typeface="Calibri" pitchFamily="34" charset="0"/>
+                <a:ea typeface="Calibri" pitchFamily="34" charset="-122"/>
+                <a:cs typeface="Calibri" pitchFamily="34" charset="-120"/>
+              </a:rPr>
+              <a:t>ANSWER  </a:t>
+            </a:r>
+            <a:pPr indent="0" marL="0">
+              <a:buNone/>
+            </a:pPr>
+            <a:r>
+              <a:rPr lang="en-US" sz="1500" b="1" dirty="0">
+                <a:solidFill>
+                  <a:srgbClr val="1B2A38"/>
+                </a:solidFill>
+                <a:latin typeface="Calibri" pitchFamily="34" charset="0"/>
+                <a:ea typeface="Calibri" pitchFamily="34" charset="-122"/>
+                <a:cs typeface="Calibri" pitchFamily="34" charset="-120"/>
+              </a:rPr>
+              <a:t>B — Review the smear</a:t>
+            </a:r>
+            <a:endParaRPr lang="en-US" sz="1500" dirty="0"/>
+          </a:p>
+        </p:txBody>
+      </p:sp>
+      <p:sp>
+        <p:nvSpPr>
+          <p:cNvPr id="8" name="Text 6"/>
+          <p:cNvSpPr/>
+          <p:nvPr/>
+        </p:nvSpPr>
+        <p:spPr>
+          <a:xfrm>
+            <a:off x="7439376" y="3127248"/>
+            <a:ext cx="3947648" cy="2377440"/>
+          </a:xfrm>
+          <a:prstGeom prst="rect">
+            <a:avLst/>
+          </a:prstGeom>
+          <a:noFill/>
+          <a:ln/>
+        </p:spPr>
+        <p:txBody>
+          <a:bodyPr wrap="square" lIns="0" tIns="0" rIns="0" bIns="0" rtlCol="0" anchor="t"/>
+          <a:lstStyle/>
+          <a:p>
+            <a:pPr algn="l" indent="0" marL="0">
+              <a:lnSpc>
+                <a:spcPct val="108000"/>
+              </a:lnSpc>
+              <a:buNone/>
+            </a:pPr>
+            <a:r>
+              <a:rPr lang="en-US" sz="1250" dirty="0">
+                <a:solidFill>
+                  <a:srgbClr val="33444F"/>
+                </a:solidFill>
+                <a:latin typeface="Calibri" pitchFamily="34" charset="0"/>
+                <a:ea typeface="Calibri" pitchFamily="34" charset="-122"/>
+                <a:cs typeface="Calibri" pitchFamily="34" charset="-120"/>
+              </a:rPr>
+              <a:t>Excluding EDTA-induced clumping (pseudothrombocytopenia) prevents unnecessary, potentially harmful treatment.</a:t>
+            </a:r>
+            <a:endParaRPr lang="en-US" sz="1250" dirty="0"/>
+          </a:p>
+        </p:txBody>
+      </p:sp>
+      <p:sp>
+        <p:nvSpPr>
+          <p:cNvPr id="9" name="Text 7"/>
+          <p:cNvSpPr/>
+          <p:nvPr/>
+        </p:nvSpPr>
+        <p:spPr>
+          <a:xfrm>
+            <a:off x="566928" y="6473952"/>
+            <a:ext cx="7772400" cy="274320"/>
+          </a:xfrm>
+          <a:prstGeom prst="rect">
+            <a:avLst/>
+          </a:prstGeom>
+          <a:noFill/>
+          <a:ln/>
+        </p:spPr>
+        <p:txBody>
+          <a:bodyPr wrap="square" lIns="0" tIns="0" rIns="0" bIns="0" rtlCol="0" anchor="ctr"/>
+          <a:lstStyle/>
+          <a:p>
+            <a:pPr algn="l" indent="0" marL="0">
+              <a:buNone/>
+            </a:pPr>
+            <a:r>
+              <a:rPr lang="en-US" sz="850" dirty="0">
+                <a:solidFill>
+                  <a:srgbClr val="9AA8B4"/>
+                </a:solidFill>
+                <a:latin typeface="Calibri" pitchFamily="34" charset="0"/>
+                <a:ea typeface="Calibri" pitchFamily="34" charset="-122"/>
+                <a:cs typeface="Calibri" pitchFamily="34" charset="-120"/>
+              </a:rPr>
+              <a:t>Makassed General Hospital  ·  Department of Laboratory Medicine</a:t>
+            </a:r>
+            <a:endParaRPr lang="en-US" sz="850" dirty="0"/>
+          </a:p>
+        </p:txBody>
+      </p:sp>
+      <p:sp>
+        <p:nvSpPr>
+          <p:cNvPr id="10" name="Text 8"/>
+          <p:cNvSpPr/>
+          <p:nvPr/>
+        </p:nvSpPr>
+        <p:spPr>
+          <a:xfrm>
+            <a:off x="9814255" y="6473952"/>
+            <a:ext cx="1828800" cy="274320"/>
+          </a:xfrm>
+          <a:prstGeom prst="rect">
+            <a:avLst/>
+          </a:prstGeom>
+          <a:noFill/>
+          <a:ln/>
+        </p:spPr>
+        <p:txBody>
+          <a:bodyPr wrap="square" lIns="0" tIns="0" rIns="0" bIns="0" rtlCol="0" anchor="ctr"/>
+          <a:lstStyle/>
+          <a:p>
+            <a:pPr algn="r" indent="0" marL="0">
+              <a:buNone/>
+            </a:pPr>
+            <a:r>
+              <a:rPr lang="en-US" sz="850" dirty="0">
+                <a:solidFill>
+                  <a:srgbClr val="9AA8B4"/>
+                </a:solidFill>
+                <a:latin typeface="Calibri" pitchFamily="34" charset="0"/>
+                <a:ea typeface="Calibri" pitchFamily="34" charset="-122"/>
+                <a:cs typeface="Calibri" pitchFamily="34" charset="-120"/>
+              </a:rPr>
+              <a:t>CP Lecture Series</a:t>
+            </a:r>
+            <a:pPr algn="r" indent="0" marL="0">
+              <a:buNone/>
+            </a:pPr>
+            <a:r>
+              <a:rPr lang="en-US" sz="850" dirty="0">
+                <a:solidFill>
+                  <a:srgbClr val="DCE4EC"/>
+                </a:solidFill>
+                <a:latin typeface="Calibri" pitchFamily="34" charset="0"/>
+                <a:ea typeface="Calibri" pitchFamily="34" charset="-122"/>
+                <a:cs typeface="Calibri" pitchFamily="34" charset="-120"/>
+              </a:rPr>
+              <a:t>   ·   </a:t>
+            </a:r>
+            <a:pPr algn="r" indent="0" marL="0">
+              <a:buNone/>
+            </a:pPr>
+            <a:r>
+              <a:rPr lang="en-US" sz="850" b="1" dirty="0">
+                <a:solidFill>
+                  <a:srgbClr val="C62133"/>
+                </a:solidFill>
+                <a:latin typeface="Calibri" pitchFamily="34" charset="0"/>
+                <a:ea typeface="Calibri" pitchFamily="34" charset="-122"/>
+                <a:cs typeface="Calibri" pitchFamily="34" charset="-120"/>
+              </a:rPr>
+              <a:t>18</a:t>
             </a:r>
             <a:endParaRPr lang="en-US" sz="850" dirty="0"/>
           </a:p>
@@ -13224,6 +14900,10 @@
             </a:outerShdw>
           </a:effectLst>
         </p:spPr>
+        <p:txBody>
+          <a:bodyPr/>
+          <a:p/>
+        </p:txBody>
       </p:sp>
       <p:sp>
         <p:nvSpPr>
@@ -13251,6 +14931,10 @@
             </a:outerShdw>
           </a:effectLst>
         </p:spPr>
+        <p:txBody>
+          <a:bodyPr/>
+          <a:p/>
+        </p:txBody>
       </p:sp>
       <p:sp>
         <p:nvSpPr>
@@ -13365,6 +15049,10 @@
           </a:solidFill>
           <a:ln/>
         </p:spPr>
+        <p:txBody>
+          <a:bodyPr/>
+          <a:p/>
+        </p:txBody>
       </p:sp>
       <p:sp>
         <p:nvSpPr>
@@ -13392,6 +15080,10 @@
             </a:outerShdw>
           </a:effectLst>
         </p:spPr>
+        <p:txBody>
+          <a:bodyPr/>
+          <a:p/>
+        </p:txBody>
       </p:sp>
       <p:sp>
         <p:nvSpPr>
@@ -13513,6 +15205,10 @@
             </a:outerShdw>
           </a:effectLst>
         </p:spPr>
+        <p:txBody>
+          <a:bodyPr/>
+          <a:p/>
+        </p:txBody>
       </p:sp>
       <p:sp>
         <p:nvSpPr>
@@ -13540,6 +15236,10 @@
             </a:outerShdw>
           </a:effectLst>
         </p:spPr>
+        <p:txBody>
+          <a:bodyPr/>
+          <a:p/>
+        </p:txBody>
       </p:sp>
       <p:sp>
         <p:nvSpPr>
@@ -13654,6 +15354,10 @@
           </a:solidFill>
           <a:ln/>
         </p:spPr>
+        <p:txBody>
+          <a:bodyPr/>
+          <a:p/>
+        </p:txBody>
       </p:sp>
       <p:sp>
         <p:nvSpPr>
@@ -13681,6 +15385,10 @@
             </a:outerShdw>
           </a:effectLst>
         </p:spPr>
+        <p:txBody>
+          <a:bodyPr/>
+          <a:p/>
+        </p:txBody>
       </p:sp>
       <p:sp>
         <p:nvSpPr>
@@ -13802,6 +15510,10 @@
             </a:outerShdw>
           </a:effectLst>
         </p:spPr>
+        <p:txBody>
+          <a:bodyPr/>
+          <a:p/>
+        </p:txBody>
       </p:sp>
       <p:sp>
         <p:nvSpPr>
@@ -13829,6 +15541,10 @@
             </a:outerShdw>
           </a:effectLst>
         </p:spPr>
+        <p:txBody>
+          <a:bodyPr/>
+          <a:p/>
+        </p:txBody>
       </p:sp>
       <p:sp>
         <p:nvSpPr>
@@ -14067,6 +15783,10 @@
           </a:solidFill>
           <a:ln/>
         </p:spPr>
+        <p:txBody>
+          <a:bodyPr/>
+          <a:p/>
+        </p:txBody>
       </p:sp>
       <p:sp>
         <p:nvSpPr>
@@ -14089,6 +15809,10 @@
           </a:solidFill>
           <a:ln/>
         </p:spPr>
+        <p:txBody>
+          <a:bodyPr/>
+          <a:p/>
+        </p:txBody>
       </p:sp>
       <p:sp>
         <p:nvSpPr>
@@ -14350,6 +16074,10 @@
             </a:outerShdw>
           </a:effectLst>
         </p:spPr>
+        <p:txBody>
+          <a:bodyPr/>
+          <a:p/>
+        </p:txBody>
       </p:sp>
       <p:pic>
         <p:nvPicPr>
@@ -14658,6 +16386,10 @@
             </a:outerShdw>
           </a:effectLst>
         </p:spPr>
+        <p:txBody>
+          <a:bodyPr/>
+          <a:p/>
+        </p:txBody>
       </p:sp>
       <p:sp>
         <p:nvSpPr>
@@ -14832,6 +16564,10 @@
             </a:outerShdw>
           </a:effectLst>
         </p:spPr>
+        <p:txBody>
+          <a:bodyPr/>
+          <a:p/>
+        </p:txBody>
       </p:sp>
       <p:sp>
         <p:nvSpPr>
@@ -15222,6 +16958,10 @@
             </a:outerShdw>
           </a:effectLst>
         </p:spPr>
+        <p:txBody>
+          <a:bodyPr/>
+          <a:p/>
+        </p:txBody>
       </p:sp>
       <p:sp>
         <p:nvSpPr>
@@ -15396,6 +17136,10 @@
             </a:outerShdw>
           </a:effectLst>
         </p:spPr>
+        <p:txBody>
+          <a:bodyPr/>
+          <a:p/>
+        </p:txBody>
       </p:sp>
       <p:sp>
         <p:nvSpPr>
@@ -15701,6 +17445,10 @@
           </a:solidFill>
           <a:ln/>
         </p:spPr>
+        <p:txBody>
+          <a:bodyPr/>
+          <a:p/>
+        </p:txBody>
       </p:sp>
       <p:sp>
         <p:nvSpPr>
@@ -15723,6 +17471,10 @@
           </a:solidFill>
           <a:ln/>
         </p:spPr>
+        <p:txBody>
+          <a:bodyPr/>
+          <a:p/>
+        </p:txBody>
       </p:sp>
       <p:sp>
         <p:nvSpPr>
